--- a/public/lessons/year-6-maths/summer/week-26/name-parts-of-circles/teaching-powerpoint-v1.pptx
+++ b/public/lessons/year-6-maths/summer/week-26/name-parts-of-circles/teaching-powerpoint-v1.pptx
@@ -2,24 +2,24 @@
 <file path=ppt/presentation.xml><?xml version="1.0" encoding="utf-8"?>
 <p:presentation xmlns:p="http://schemas.openxmlformats.org/presentationml/2006/main">
   <p:sldMasterIdLst>
-    <p:sldMasterId xmlns:r="http://schemas.openxmlformats.org/officeDocument/2006/relationships" id="2147483648" r:id="Rd561cd375c334976"/>
+    <p:sldMasterId xmlns:r="http://schemas.openxmlformats.org/officeDocument/2006/relationships" id="2147483648" r:id="Ref10ded11e434f49"/>
   </p:sldMasterIdLst>
   <p:notesMasterIdLst>
-    <p:notesMasterId xmlns:r="http://schemas.openxmlformats.org/officeDocument/2006/relationships" r:id="R74161645bf1d4361"/>
+    <p:notesMasterId xmlns:r="http://schemas.openxmlformats.org/officeDocument/2006/relationships" r:id="R0ab80e6c73fc4644"/>
   </p:notesMasterIdLst>
   <p:sldIdLst>
-    <p:sldId xmlns:r="http://schemas.openxmlformats.org/officeDocument/2006/relationships" id="256" r:id="R17cf4b6b17444ab0"/>
-    <p:sldId xmlns:r="http://schemas.openxmlformats.org/officeDocument/2006/relationships" id="257" r:id="Rce26843cf5ff45f5"/>
-    <p:sldId xmlns:r="http://schemas.openxmlformats.org/officeDocument/2006/relationships" id="258" r:id="R27db101f231b48a3"/>
-    <p:sldId xmlns:r="http://schemas.openxmlformats.org/officeDocument/2006/relationships" id="259" r:id="Raf1942f4744e4ac4"/>
-    <p:sldId xmlns:r="http://schemas.openxmlformats.org/officeDocument/2006/relationships" id="260" r:id="R1aae784c8f28405f"/>
-    <p:sldId xmlns:r="http://schemas.openxmlformats.org/officeDocument/2006/relationships" id="261" r:id="R38ca37ace9604897"/>
-    <p:sldId xmlns:r="http://schemas.openxmlformats.org/officeDocument/2006/relationships" id="262" r:id="R9b73a43986074430"/>
-    <p:sldId xmlns:r="http://schemas.openxmlformats.org/officeDocument/2006/relationships" id="263" r:id="Rea4e1d55ab7d4234"/>
-    <p:sldId xmlns:r="http://schemas.openxmlformats.org/officeDocument/2006/relationships" id="264" r:id="Rd328282a43d943dd"/>
-    <p:sldId xmlns:r="http://schemas.openxmlformats.org/officeDocument/2006/relationships" id="265" r:id="Rc2c3762e274b40d9"/>
-    <p:sldId xmlns:r="http://schemas.openxmlformats.org/officeDocument/2006/relationships" id="266" r:id="Rd882cb14556b4ce9"/>
-    <p:sldId xmlns:r="http://schemas.openxmlformats.org/officeDocument/2006/relationships" id="267" r:id="Reec40c7d8a7c4477"/>
+    <p:sldId xmlns:r="http://schemas.openxmlformats.org/officeDocument/2006/relationships" id="256" r:id="R20cfd2fb7f2f4d82"/>
+    <p:sldId xmlns:r="http://schemas.openxmlformats.org/officeDocument/2006/relationships" id="257" r:id="Ra1fa97f2e5184ff7"/>
+    <p:sldId xmlns:r="http://schemas.openxmlformats.org/officeDocument/2006/relationships" id="258" r:id="R5369258579124ead"/>
+    <p:sldId xmlns:r="http://schemas.openxmlformats.org/officeDocument/2006/relationships" id="259" r:id="R9c7c2dcc59f34a0f"/>
+    <p:sldId xmlns:r="http://schemas.openxmlformats.org/officeDocument/2006/relationships" id="260" r:id="R47f18e92b59a4cff"/>
+    <p:sldId xmlns:r="http://schemas.openxmlformats.org/officeDocument/2006/relationships" id="261" r:id="Ra158b6a427304510"/>
+    <p:sldId xmlns:r="http://schemas.openxmlformats.org/officeDocument/2006/relationships" id="262" r:id="R2847c58d7ec04861"/>
+    <p:sldId xmlns:r="http://schemas.openxmlformats.org/officeDocument/2006/relationships" id="263" r:id="R5ef73b54cddb4353"/>
+    <p:sldId xmlns:r="http://schemas.openxmlformats.org/officeDocument/2006/relationships" id="264" r:id="Rd158fcf58c6d4a25"/>
+    <p:sldId xmlns:r="http://schemas.openxmlformats.org/officeDocument/2006/relationships" id="265" r:id="R17b04e96331a4a0d"/>
+    <p:sldId xmlns:r="http://schemas.openxmlformats.org/officeDocument/2006/relationships" id="266" r:id="R96e5ea360034468e"/>
+    <p:sldId xmlns:r="http://schemas.openxmlformats.org/officeDocument/2006/relationships" id="267" r:id="R0b1c2f15fb1c4730"/>
   </p:sldIdLst>
   <p:sldSz cx="12192000" cy="6858000"/>
   <p:notesSz cx="6858000" cy="9144000"/>
@@ -873,7 +873,7 @@
           <a:lstStyle xmlns:a="http://schemas.openxmlformats.org/drawingml/2006/main"/>
           <a:p xmlns:a="http://schemas.openxmlformats.org/drawingml/2006/main">
             <a:r>
-              <a:t>I do. Reveal the question, setup and each calculation stage one click at a time. Pupils watch before copying. Model answer: 9 cm.</a:t>
+              <a:t>I do. Reveal the question, then reveal each mathematical change one click at a time. Point to the numbers and operation that changed before moving to the next line. Final answer: 9 cm.</a:t>
             </a:r>
           </a:p>
         </p:txBody>
@@ -1291,7 +1291,7 @@
   </p:cSld>
   <p:clrMap bg1="lt1" tx1="dk1" bg2="lt2" tx2="dk2" accent1="accent1" accent2="accent2" accent3="accent3" accent4="accent4" accent5="accent5" accent6="accent6" hlink="hlink" folHlink="folHlink"/>
   <p:sldLayoutIdLst>
-    <p:sldLayoutId xmlns:r="http://schemas.openxmlformats.org/officeDocument/2006/relationships" id="2147483649" r:id="Rf436a35456b84e75"/>
+    <p:sldLayoutId xmlns:r="http://schemas.openxmlformats.org/officeDocument/2006/relationships" id="2147483649" r:id="Rc2699524aa0149b1"/>
   </p:sldLayoutIdLst>
   <p:txStyles>
     <p:titleStyle>
@@ -1842,7 +1842,7 @@
           <p:cNvPr id="12" name="">
             <a:extLst xmlns:a="http://schemas.openxmlformats.org/drawingml/2006/main">
               <a:ext uri="{FF2B5EF4-FFF2-40B4-BE49-F238E27FC236}">
-                <a16:creationId xmlns:a16="http://schemas.microsoft.com/office/drawing/2014/main" id="{2C74B37B-D1D3-4F6D-9F6D-9CE210166F01}"/>
+                <a16:creationId xmlns:a16="http://schemas.microsoft.com/office/drawing/2014/main" id="{484A1E11-B0CE-4F8D-B3D0-FA3629083D36}"/>
               </a:ext>
             </a:extLst>
           </p:cNvPr>
@@ -1874,7 +1874,7 @@
           <p:cNvPr id="2" name="">
             <a:extLst xmlns:a="http://schemas.openxmlformats.org/drawingml/2006/main">
               <a:ext uri="{FF2B5EF4-FFF2-40B4-BE49-F238E27FC236}">
-                <a16:creationId xmlns:a16="http://schemas.microsoft.com/office/drawing/2014/main" id="{AA22B5DB-694A-45C1-8F98-8CCE36DC0777}"/>
+                <a16:creationId xmlns:a16="http://schemas.microsoft.com/office/drawing/2014/main" id="{C9C148C9-D48C-4F99-9108-84C17C2E9BC3}"/>
               </a:ext>
             </a:extLst>
           </p:cNvPr>
@@ -1931,7 +1931,7 @@
           <p:cNvPr id="3" name="">
             <a:extLst xmlns:a="http://schemas.openxmlformats.org/drawingml/2006/main">
               <a:ext uri="{FF2B5EF4-FFF2-40B4-BE49-F238E27FC236}">
-                <a16:creationId xmlns:a16="http://schemas.microsoft.com/office/drawing/2014/main" id="{D9CCA307-A36D-4701-88C0-0974D64F39D1}"/>
+                <a16:creationId xmlns:a16="http://schemas.microsoft.com/office/drawing/2014/main" id="{C5817DB5-51AE-4DBF-BADE-A3AA6ED68E04}"/>
               </a:ext>
             </a:extLst>
           </p:cNvPr>
@@ -1965,7 +1965,7 @@
           <p:cNvPr id="4" name="">
             <a:extLst xmlns:a="http://schemas.openxmlformats.org/drawingml/2006/main">
               <a:ext uri="{FF2B5EF4-FFF2-40B4-BE49-F238E27FC236}">
-                <a16:creationId xmlns:a16="http://schemas.microsoft.com/office/drawing/2014/main" id="{3950BD06-12DC-469B-BA2F-EBAD2EB157AE}"/>
+                <a16:creationId xmlns:a16="http://schemas.microsoft.com/office/drawing/2014/main" id="{0ABA2DD9-0FA5-4894-B849-A6209094ABD5}"/>
               </a:ext>
             </a:extLst>
           </p:cNvPr>
@@ -2022,7 +2022,7 @@
           <p:cNvPr id="5" name="">
             <a:extLst xmlns:a="http://schemas.openxmlformats.org/drawingml/2006/main">
               <a:ext uri="{FF2B5EF4-FFF2-40B4-BE49-F238E27FC236}">
-                <a16:creationId xmlns:a16="http://schemas.microsoft.com/office/drawing/2014/main" id="{3488DB56-7232-4596-8FA8-7C6F7F056705}"/>
+                <a16:creationId xmlns:a16="http://schemas.microsoft.com/office/drawing/2014/main" id="{0F08CE22-AB6A-47DC-8C86-7255B588CBAF}"/>
               </a:ext>
             </a:extLst>
           </p:cNvPr>
@@ -2079,7 +2079,7 @@
           <p:cNvPr id="6" name="">
             <a:extLst xmlns:a="http://schemas.openxmlformats.org/drawingml/2006/main">
               <a:ext uri="{FF2B5EF4-FFF2-40B4-BE49-F238E27FC236}">
-                <a16:creationId xmlns:a16="http://schemas.microsoft.com/office/drawing/2014/main" id="{B63D7A2D-2AA0-4104-A3D9-DB79FD05DEB1}"/>
+                <a16:creationId xmlns:a16="http://schemas.microsoft.com/office/drawing/2014/main" id="{B0B9CBFD-D5FF-4F3C-A2D4-C10DD27AC1DC}"/>
               </a:ext>
             </a:extLst>
           </p:cNvPr>
@@ -2113,7 +2113,7 @@
           <p:cNvPr id="7" name="">
             <a:extLst xmlns:a="http://schemas.openxmlformats.org/drawingml/2006/main">
               <a:ext uri="{FF2B5EF4-FFF2-40B4-BE49-F238E27FC236}">
-                <a16:creationId xmlns:a16="http://schemas.microsoft.com/office/drawing/2014/main" id="{0F6E06B6-08A1-4AFE-BEC7-FF6B714BF79E}"/>
+                <a16:creationId xmlns:a16="http://schemas.microsoft.com/office/drawing/2014/main" id="{6B65738E-DAA3-4261-B535-B1E8B63693E2}"/>
               </a:ext>
             </a:extLst>
           </p:cNvPr>
@@ -2170,7 +2170,7 @@
           <p:cNvPr id="8" name="">
             <a:extLst xmlns:a="http://schemas.openxmlformats.org/drawingml/2006/main">
               <a:ext uri="{FF2B5EF4-FFF2-40B4-BE49-F238E27FC236}">
-                <a16:creationId xmlns:a16="http://schemas.microsoft.com/office/drawing/2014/main" id="{5358298F-1498-4279-BEF6-CA573AAE43B2}"/>
+                <a16:creationId xmlns:a16="http://schemas.microsoft.com/office/drawing/2014/main" id="{280A953E-DC88-440A-A567-E34484080004}"/>
               </a:ext>
             </a:extLst>
           </p:cNvPr>
@@ -2227,7 +2227,7 @@
           <p:cNvPr id="9" name="">
             <a:extLst xmlns:a="http://schemas.openxmlformats.org/drawingml/2006/main">
               <a:ext uri="{FF2B5EF4-FFF2-40B4-BE49-F238E27FC236}">
-                <a16:creationId xmlns:a16="http://schemas.microsoft.com/office/drawing/2014/main" id="{1071E2AF-FFAB-45F0-A89F-74F4FFD19C80}"/>
+                <a16:creationId xmlns:a16="http://schemas.microsoft.com/office/drawing/2014/main" id="{0C2AE0C2-3CFE-4A6F-AAFE-1B6ABC513C4B}"/>
               </a:ext>
             </a:extLst>
           </p:cNvPr>
@@ -2284,7 +2284,7 @@
           <p:cNvPr id="10" name="">
             <a:extLst xmlns:a="http://schemas.openxmlformats.org/drawingml/2006/main">
               <a:ext uri="{FF2B5EF4-FFF2-40B4-BE49-F238E27FC236}">
-                <a16:creationId xmlns:a16="http://schemas.microsoft.com/office/drawing/2014/main" id="{3CF122D7-9D02-4FFE-AF46-7C73517128F9}"/>
+                <a16:creationId xmlns:a16="http://schemas.microsoft.com/office/drawing/2014/main" id="{8DB65F6D-D3D8-4227-B6E6-7B267824729E}"/>
               </a:ext>
             </a:extLst>
           </p:cNvPr>
@@ -2341,7 +2341,7 @@
           <p:cNvPr id="11" name="">
             <a:extLst xmlns:a="http://schemas.openxmlformats.org/drawingml/2006/main">
               <a:ext uri="{FF2B5EF4-FFF2-40B4-BE49-F238E27FC236}">
-                <a16:creationId xmlns:a16="http://schemas.microsoft.com/office/drawing/2014/main" id="{BDB649E5-06EA-442A-97AC-0A673A5B01F8}"/>
+                <a16:creationId xmlns:a16="http://schemas.microsoft.com/office/drawing/2014/main" id="{379C66D6-3B1E-4A0B-AA50-2926A39FA362}"/>
               </a:ext>
             </a:extLst>
           </p:cNvPr>
@@ -2396,7 +2396,7 @@
     </p:spTree>
     <p:extLst>
       <p:ext uri="{BB962C8B-B14F-4D97-AF65-F5344CB8AC3E}">
-        <p14:creationId xmlns:p14="http://schemas.microsoft.com/office/powerpoint/2010/main" val="548626495"/>
+        <p14:creationId xmlns:p14="http://schemas.microsoft.com/office/powerpoint/2010/main" val="1516364747"/>
       </p:ext>
     </p:extLst>
   </p:cSld>
@@ -2427,7 +2427,7 @@
           <p:cNvPr id="14" name="">
             <a:extLst xmlns:a="http://schemas.openxmlformats.org/drawingml/2006/main">
               <a:ext uri="{FF2B5EF4-FFF2-40B4-BE49-F238E27FC236}">
-                <a16:creationId xmlns:a16="http://schemas.microsoft.com/office/drawing/2014/main" id="{34D39530-4A40-4BFD-915F-DCB0C289525F}"/>
+                <a16:creationId xmlns:a16="http://schemas.microsoft.com/office/drawing/2014/main" id="{03E567B7-214A-4786-AC20-FEA3AB28C3CD}"/>
               </a:ext>
             </a:extLst>
           </p:cNvPr>
@@ -2459,7 +2459,7 @@
           <p:cNvPr id="2" name="">
             <a:extLst xmlns:a="http://schemas.openxmlformats.org/drawingml/2006/main">
               <a:ext uri="{FF2B5EF4-FFF2-40B4-BE49-F238E27FC236}">
-                <a16:creationId xmlns:a16="http://schemas.microsoft.com/office/drawing/2014/main" id="{842D7DB3-D47F-4787-A40D-DC1167FFEDE7}"/>
+                <a16:creationId xmlns:a16="http://schemas.microsoft.com/office/drawing/2014/main" id="{6D5A62FF-A8E2-483A-A581-FBD047A4CEE0}"/>
               </a:ext>
             </a:extLst>
           </p:cNvPr>
@@ -2516,7 +2516,7 @@
           <p:cNvPr id="3" name="">
             <a:extLst xmlns:a="http://schemas.openxmlformats.org/drawingml/2006/main">
               <a:ext uri="{FF2B5EF4-FFF2-40B4-BE49-F238E27FC236}">
-                <a16:creationId xmlns:a16="http://schemas.microsoft.com/office/drawing/2014/main" id="{16751A98-2620-44BA-ABB0-96B7B5B153D3}"/>
+                <a16:creationId xmlns:a16="http://schemas.microsoft.com/office/drawing/2014/main" id="{4DC3899A-7A6B-4CB5-BCA8-DD35FB10B952}"/>
               </a:ext>
             </a:extLst>
           </p:cNvPr>
@@ -2548,7 +2548,7 @@
           <p:cNvPr id="4" name="">
             <a:extLst xmlns:a="http://schemas.openxmlformats.org/drawingml/2006/main">
               <a:ext uri="{FF2B5EF4-FFF2-40B4-BE49-F238E27FC236}">
-                <a16:creationId xmlns:a16="http://schemas.microsoft.com/office/drawing/2014/main" id="{F1616F5F-54A0-4F47-9D1A-88A145CB4F90}"/>
+                <a16:creationId xmlns:a16="http://schemas.microsoft.com/office/drawing/2014/main" id="{C4FF1774-816C-4216-8FC6-C4A879141365}"/>
               </a:ext>
             </a:extLst>
           </p:cNvPr>
@@ -2605,7 +2605,7 @@
           <p:cNvPr id="5" name="">
             <a:extLst xmlns:a="http://schemas.openxmlformats.org/drawingml/2006/main">
               <a:ext uri="{FF2B5EF4-FFF2-40B4-BE49-F238E27FC236}">
-                <a16:creationId xmlns:a16="http://schemas.microsoft.com/office/drawing/2014/main" id="{7D129E62-B852-4234-8B8A-D016819107C8}"/>
+                <a16:creationId xmlns:a16="http://schemas.microsoft.com/office/drawing/2014/main" id="{856E9A7B-2864-4379-A2F8-4E65A8CAA032}"/>
               </a:ext>
             </a:extLst>
           </p:cNvPr>
@@ -2662,7 +2662,7 @@
           <p:cNvPr id="6" name="">
             <a:extLst xmlns:a="http://schemas.openxmlformats.org/drawingml/2006/main">
               <a:ext uri="{FF2B5EF4-FFF2-40B4-BE49-F238E27FC236}">
-                <a16:creationId xmlns:a16="http://schemas.microsoft.com/office/drawing/2014/main" id="{D3161DF9-8F00-418B-B335-757194A21F7C}"/>
+                <a16:creationId xmlns:a16="http://schemas.microsoft.com/office/drawing/2014/main" id="{76B5DC7F-F0A8-491C-A608-1AC52DE3220D}"/>
               </a:ext>
             </a:extLst>
           </p:cNvPr>
@@ -2719,7 +2719,7 @@
           <p:cNvPr id="7" name="">
             <a:extLst xmlns:a="http://schemas.openxmlformats.org/drawingml/2006/main">
               <a:ext uri="{FF2B5EF4-FFF2-40B4-BE49-F238E27FC236}">
-                <a16:creationId xmlns:a16="http://schemas.microsoft.com/office/drawing/2014/main" id="{41BA8BC1-BBC8-4A62-9C21-5230BEF8482E}"/>
+                <a16:creationId xmlns:a16="http://schemas.microsoft.com/office/drawing/2014/main" id="{0D1C7F93-CA67-4121-9FAB-05F2A98D1458}"/>
               </a:ext>
             </a:extLst>
           </p:cNvPr>
@@ -2751,7 +2751,7 @@
           <p:cNvPr id="8" name="">
             <a:extLst xmlns:a="http://schemas.openxmlformats.org/drawingml/2006/main">
               <a:ext uri="{FF2B5EF4-FFF2-40B4-BE49-F238E27FC236}">
-                <a16:creationId xmlns:a16="http://schemas.microsoft.com/office/drawing/2014/main" id="{FDFCC9C7-6D63-4D31-86DE-252435194FEB}"/>
+                <a16:creationId xmlns:a16="http://schemas.microsoft.com/office/drawing/2014/main" id="{DC271230-8E0C-4928-AB17-28D1D3987A95}"/>
               </a:ext>
             </a:extLst>
           </p:cNvPr>
@@ -2808,7 +2808,7 @@
           <p:cNvPr id="9" name="">
             <a:extLst xmlns:a="http://schemas.openxmlformats.org/drawingml/2006/main">
               <a:ext uri="{FF2B5EF4-FFF2-40B4-BE49-F238E27FC236}">
-                <a16:creationId xmlns:a16="http://schemas.microsoft.com/office/drawing/2014/main" id="{9557E923-4309-4E89-BC6D-D8C0EBAB82D9}"/>
+                <a16:creationId xmlns:a16="http://schemas.microsoft.com/office/drawing/2014/main" id="{D42250B3-CC1A-49D8-AF04-CD0D59025D0B}"/>
               </a:ext>
             </a:extLst>
           </p:cNvPr>
@@ -2865,7 +2865,7 @@
           <p:cNvPr id="10" name="">
             <a:extLst xmlns:a="http://schemas.openxmlformats.org/drawingml/2006/main">
               <a:ext uri="{FF2B5EF4-FFF2-40B4-BE49-F238E27FC236}">
-                <a16:creationId xmlns:a16="http://schemas.microsoft.com/office/drawing/2014/main" id="{DCBF12AB-496F-4340-A1A0-D770F5583B5E}"/>
+                <a16:creationId xmlns:a16="http://schemas.microsoft.com/office/drawing/2014/main" id="{D14F9C9F-774B-419D-BB9A-7111A4879095}"/>
               </a:ext>
             </a:extLst>
           </p:cNvPr>
@@ -2922,7 +2922,7 @@
           <p:cNvPr id="11" name="">
             <a:extLst xmlns:a="http://schemas.openxmlformats.org/drawingml/2006/main">
               <a:ext uri="{FF2B5EF4-FFF2-40B4-BE49-F238E27FC236}">
-                <a16:creationId xmlns:a16="http://schemas.microsoft.com/office/drawing/2014/main" id="{794AB32E-77E9-416C-A257-FF6468912C7F}"/>
+                <a16:creationId xmlns:a16="http://schemas.microsoft.com/office/drawing/2014/main" id="{447E4E3A-6B80-42DC-A213-6B8796F18A0D}"/>
               </a:ext>
             </a:extLst>
           </p:cNvPr>
@@ -2979,7 +2979,7 @@
           <p:cNvPr id="12" name="">
             <a:extLst xmlns:a="http://schemas.openxmlformats.org/drawingml/2006/main">
               <a:ext uri="{FF2B5EF4-FFF2-40B4-BE49-F238E27FC236}">
-                <a16:creationId xmlns:a16="http://schemas.microsoft.com/office/drawing/2014/main" id="{11CCACCE-8B57-43B5-88D2-B3BF82287F62}"/>
+                <a16:creationId xmlns:a16="http://schemas.microsoft.com/office/drawing/2014/main" id="{3C17B641-A1AD-4494-9E17-799A3B69DC9F}"/>
               </a:ext>
             </a:extLst>
           </p:cNvPr>
@@ -3036,7 +3036,7 @@
           <p:cNvPr id="13" name="">
             <a:extLst xmlns:a="http://schemas.openxmlformats.org/drawingml/2006/main">
               <a:ext uri="{FF2B5EF4-FFF2-40B4-BE49-F238E27FC236}">
-                <a16:creationId xmlns:a16="http://schemas.microsoft.com/office/drawing/2014/main" id="{34D88984-C922-461B-A609-73B3269A3199}"/>
+                <a16:creationId xmlns:a16="http://schemas.microsoft.com/office/drawing/2014/main" id="{3C99CF6F-D359-4AD7-A95E-9FC7FE0E1C63}"/>
               </a:ext>
             </a:extLst>
           </p:cNvPr>
@@ -3091,7 +3091,7 @@
     </p:spTree>
     <p:extLst>
       <p:ext uri="{BB962C8B-B14F-4D97-AF65-F5344CB8AC3E}">
-        <p14:creationId xmlns:p14="http://schemas.microsoft.com/office/powerpoint/2010/main" val="439483626"/>
+        <p14:creationId xmlns:p14="http://schemas.microsoft.com/office/powerpoint/2010/main" val="144774789"/>
       </p:ext>
     </p:extLst>
   </p:cSld>
@@ -3292,7 +3292,7 @@
           <p:cNvPr id="19" name="">
             <a:extLst xmlns:a="http://schemas.openxmlformats.org/drawingml/2006/main">
               <a:ext uri="{FF2B5EF4-FFF2-40B4-BE49-F238E27FC236}">
-                <a16:creationId xmlns:a16="http://schemas.microsoft.com/office/drawing/2014/main" id="{DCF8C6BC-4F08-4D6B-804B-CECE2E708990}"/>
+                <a16:creationId xmlns:a16="http://schemas.microsoft.com/office/drawing/2014/main" id="{B0814393-A5AA-4151-A032-800D5263FC93}"/>
               </a:ext>
             </a:extLst>
           </p:cNvPr>
@@ -3324,7 +3324,7 @@
           <p:cNvPr id="2" name="">
             <a:extLst xmlns:a="http://schemas.openxmlformats.org/drawingml/2006/main">
               <a:ext uri="{FF2B5EF4-FFF2-40B4-BE49-F238E27FC236}">
-                <a16:creationId xmlns:a16="http://schemas.microsoft.com/office/drawing/2014/main" id="{24350EB7-8CBA-4E40-BA09-267BE6942ECC}"/>
+                <a16:creationId xmlns:a16="http://schemas.microsoft.com/office/drawing/2014/main" id="{01427D8D-D4B8-4486-9773-40ED0F91BA8B}"/>
               </a:ext>
             </a:extLst>
           </p:cNvPr>
@@ -3381,7 +3381,7 @@
           <p:cNvPr id="3" name="">
             <a:extLst xmlns:a="http://schemas.openxmlformats.org/drawingml/2006/main">
               <a:ext uri="{FF2B5EF4-FFF2-40B4-BE49-F238E27FC236}">
-                <a16:creationId xmlns:a16="http://schemas.microsoft.com/office/drawing/2014/main" id="{F2B3B162-8D6C-444F-B5C5-D30C4F923D1E}"/>
+                <a16:creationId xmlns:a16="http://schemas.microsoft.com/office/drawing/2014/main" id="{55619162-A042-4F2B-8F23-93ACC3B59E2B}"/>
               </a:ext>
             </a:extLst>
           </p:cNvPr>
@@ -3413,7 +3413,7 @@
           <p:cNvPr id="4" name="">
             <a:extLst xmlns:a="http://schemas.openxmlformats.org/drawingml/2006/main">
               <a:ext uri="{FF2B5EF4-FFF2-40B4-BE49-F238E27FC236}">
-                <a16:creationId xmlns:a16="http://schemas.microsoft.com/office/drawing/2014/main" id="{CA9F3028-A35C-4C70-B791-8484E5492FF5}"/>
+                <a16:creationId xmlns:a16="http://schemas.microsoft.com/office/drawing/2014/main" id="{7CA6F928-8CBE-4459-8133-59AAA2D89C8F}"/>
               </a:ext>
             </a:extLst>
           </p:cNvPr>
@@ -3470,7 +3470,7 @@
           <p:cNvPr id="5" name="">
             <a:extLst xmlns:a="http://schemas.openxmlformats.org/drawingml/2006/main">
               <a:ext uri="{FF2B5EF4-FFF2-40B4-BE49-F238E27FC236}">
-                <a16:creationId xmlns:a16="http://schemas.microsoft.com/office/drawing/2014/main" id="{36E47485-C282-450D-BA8C-D2177357D237}"/>
+                <a16:creationId xmlns:a16="http://schemas.microsoft.com/office/drawing/2014/main" id="{B9CDC251-28EE-4FC3-9964-DA02F6639909}"/>
               </a:ext>
             </a:extLst>
           </p:cNvPr>
@@ -3527,7 +3527,7 @@
           <p:cNvPr id="6" name="">
             <a:extLst xmlns:a="http://schemas.openxmlformats.org/drawingml/2006/main">
               <a:ext uri="{FF2B5EF4-FFF2-40B4-BE49-F238E27FC236}">
-                <a16:creationId xmlns:a16="http://schemas.microsoft.com/office/drawing/2014/main" id="{907F1F0F-E8F4-43F0-A1FB-16882DE642E5}"/>
+                <a16:creationId xmlns:a16="http://schemas.microsoft.com/office/drawing/2014/main" id="{28A6C89A-7A96-4C39-B09A-C5E4483DCF5F}"/>
               </a:ext>
             </a:extLst>
           </p:cNvPr>
@@ -3584,7 +3584,7 @@
           <p:cNvPr id="7" name="">
             <a:extLst xmlns:a="http://schemas.openxmlformats.org/drawingml/2006/main">
               <a:ext uri="{FF2B5EF4-FFF2-40B4-BE49-F238E27FC236}">
-                <a16:creationId xmlns:a16="http://schemas.microsoft.com/office/drawing/2014/main" id="{A260B992-B7A8-41C4-9F08-2B7489667B07}"/>
+                <a16:creationId xmlns:a16="http://schemas.microsoft.com/office/drawing/2014/main" id="{8654E889-17C2-4968-91B8-8F11A59F7684}"/>
               </a:ext>
             </a:extLst>
           </p:cNvPr>
@@ -3616,7 +3616,7 @@
           <p:cNvPr id="8" name="">
             <a:extLst xmlns:a="http://schemas.openxmlformats.org/drawingml/2006/main">
               <a:ext uri="{FF2B5EF4-FFF2-40B4-BE49-F238E27FC236}">
-                <a16:creationId xmlns:a16="http://schemas.microsoft.com/office/drawing/2014/main" id="{FB4D1637-DD23-47E2-BAE8-DA82654FCB7A}"/>
+                <a16:creationId xmlns:a16="http://schemas.microsoft.com/office/drawing/2014/main" id="{ADC86D8D-6FAD-4D05-B6BB-44BE319A9BD0}"/>
               </a:ext>
             </a:extLst>
           </p:cNvPr>
@@ -3673,7 +3673,7 @@
           <p:cNvPr id="9" name="">
             <a:extLst xmlns:a="http://schemas.openxmlformats.org/drawingml/2006/main">
               <a:ext uri="{FF2B5EF4-FFF2-40B4-BE49-F238E27FC236}">
-                <a16:creationId xmlns:a16="http://schemas.microsoft.com/office/drawing/2014/main" id="{591202C0-6E67-4479-8A80-2F360D6F5FBE}"/>
+                <a16:creationId xmlns:a16="http://schemas.microsoft.com/office/drawing/2014/main" id="{A31CCABE-72F8-4D28-9E08-E3A9A42B5594}"/>
               </a:ext>
             </a:extLst>
           </p:cNvPr>
@@ -3730,7 +3730,7 @@
           <p:cNvPr id="10" name="">
             <a:extLst xmlns:a="http://schemas.openxmlformats.org/drawingml/2006/main">
               <a:ext uri="{FF2B5EF4-FFF2-40B4-BE49-F238E27FC236}">
-                <a16:creationId xmlns:a16="http://schemas.microsoft.com/office/drawing/2014/main" id="{0C42B29A-4D80-448A-A6B3-53AB81FE619B}"/>
+                <a16:creationId xmlns:a16="http://schemas.microsoft.com/office/drawing/2014/main" id="{3B5A84AD-AB16-4093-9BAD-BBDC9B688F64}"/>
               </a:ext>
             </a:extLst>
           </p:cNvPr>
@@ -3787,7 +3787,7 @@
           <p:cNvPr id="11" name="">
             <a:extLst xmlns:a="http://schemas.openxmlformats.org/drawingml/2006/main">
               <a:ext uri="{FF2B5EF4-FFF2-40B4-BE49-F238E27FC236}">
-                <a16:creationId xmlns:a16="http://schemas.microsoft.com/office/drawing/2014/main" id="{1E931CB1-7BFC-4E12-8E67-02D1BFCC8E41}"/>
+                <a16:creationId xmlns:a16="http://schemas.microsoft.com/office/drawing/2014/main" id="{EC5D41C8-07FB-4B18-B7EC-566B99BB4DAB}"/>
               </a:ext>
             </a:extLst>
           </p:cNvPr>
@@ -3821,7 +3821,7 @@
           <p:cNvPr id="12" name="">
             <a:extLst xmlns:a="http://schemas.openxmlformats.org/drawingml/2006/main">
               <a:ext uri="{FF2B5EF4-FFF2-40B4-BE49-F238E27FC236}">
-                <a16:creationId xmlns:a16="http://schemas.microsoft.com/office/drawing/2014/main" id="{5921C666-D667-4F7B-BEE5-07DF55A3802D}"/>
+                <a16:creationId xmlns:a16="http://schemas.microsoft.com/office/drawing/2014/main" id="{96C4F2B6-0C0E-4422-BE4C-C2E18A43AB65}"/>
               </a:ext>
             </a:extLst>
           </p:cNvPr>
@@ -3878,7 +3878,7 @@
           <p:cNvPr id="13" name="">
             <a:extLst xmlns:a="http://schemas.openxmlformats.org/drawingml/2006/main">
               <a:ext uri="{FF2B5EF4-FFF2-40B4-BE49-F238E27FC236}">
-                <a16:creationId xmlns:a16="http://schemas.microsoft.com/office/drawing/2014/main" id="{E8CB1349-A498-43FA-8039-1DA7793FAE2F}"/>
+                <a16:creationId xmlns:a16="http://schemas.microsoft.com/office/drawing/2014/main" id="{F8E2FF19-A4C7-4E88-A0E2-53DB2F8ED027}"/>
               </a:ext>
             </a:extLst>
           </p:cNvPr>
@@ -3935,7 +3935,7 @@
           <p:cNvPr id="14" name="">
             <a:extLst xmlns:a="http://schemas.openxmlformats.org/drawingml/2006/main">
               <a:ext uri="{FF2B5EF4-FFF2-40B4-BE49-F238E27FC236}">
-                <a16:creationId xmlns:a16="http://schemas.microsoft.com/office/drawing/2014/main" id="{CFD60FAF-D078-4D63-8AFB-9D2F95A6E3C1}"/>
+                <a16:creationId xmlns:a16="http://schemas.microsoft.com/office/drawing/2014/main" id="{592F0F79-A3F2-4AD0-8954-2E0D3B3023C9}"/>
               </a:ext>
             </a:extLst>
           </p:cNvPr>
@@ -3992,7 +3992,7 @@
           <p:cNvPr id="15" name="">
             <a:extLst xmlns:a="http://schemas.openxmlformats.org/drawingml/2006/main">
               <a:ext uri="{FF2B5EF4-FFF2-40B4-BE49-F238E27FC236}">
-                <a16:creationId xmlns:a16="http://schemas.microsoft.com/office/drawing/2014/main" id="{F9A7B7AD-3F60-46AB-9312-4F91B943808F}"/>
+                <a16:creationId xmlns:a16="http://schemas.microsoft.com/office/drawing/2014/main" id="{6F908C81-8F2B-4CB7-AA0E-20FEC5DFB426}"/>
               </a:ext>
             </a:extLst>
           </p:cNvPr>
@@ -4026,7 +4026,7 @@
           <p:cNvPr id="16" name="">
             <a:extLst xmlns:a="http://schemas.openxmlformats.org/drawingml/2006/main">
               <a:ext uri="{FF2B5EF4-FFF2-40B4-BE49-F238E27FC236}">
-                <a16:creationId xmlns:a16="http://schemas.microsoft.com/office/drawing/2014/main" id="{8DAB775F-4227-4DB8-9271-B762796067AA}"/>
+                <a16:creationId xmlns:a16="http://schemas.microsoft.com/office/drawing/2014/main" id="{CE0D8BA1-1D12-4541-9BED-AC1108E6681A}"/>
               </a:ext>
             </a:extLst>
           </p:cNvPr>
@@ -4083,7 +4083,7 @@
           <p:cNvPr id="17" name="">
             <a:extLst xmlns:a="http://schemas.openxmlformats.org/drawingml/2006/main">
               <a:ext uri="{FF2B5EF4-FFF2-40B4-BE49-F238E27FC236}">
-                <a16:creationId xmlns:a16="http://schemas.microsoft.com/office/drawing/2014/main" id="{42B21517-6CBF-4513-86B1-A0004A880977}"/>
+                <a16:creationId xmlns:a16="http://schemas.microsoft.com/office/drawing/2014/main" id="{CCA379C9-FDC4-4266-9408-CBB71757A759}"/>
               </a:ext>
             </a:extLst>
           </p:cNvPr>
@@ -4140,7 +4140,7 @@
           <p:cNvPr id="18" name="">
             <a:extLst xmlns:a="http://schemas.openxmlformats.org/drawingml/2006/main">
               <a:ext uri="{FF2B5EF4-FFF2-40B4-BE49-F238E27FC236}">
-                <a16:creationId xmlns:a16="http://schemas.microsoft.com/office/drawing/2014/main" id="{DB885BBD-8372-4D57-8E65-1C595F137716}"/>
+                <a16:creationId xmlns:a16="http://schemas.microsoft.com/office/drawing/2014/main" id="{48BA3FE9-40F7-452B-ACE7-A4494E71984D}"/>
               </a:ext>
             </a:extLst>
           </p:cNvPr>
@@ -4195,7 +4195,7 @@
     </p:spTree>
     <p:extLst>
       <p:ext uri="{BB962C8B-B14F-4D97-AF65-F5344CB8AC3E}">
-        <p14:creationId xmlns:p14="http://schemas.microsoft.com/office/powerpoint/2010/main" val="1008783716"/>
+        <p14:creationId xmlns:p14="http://schemas.microsoft.com/office/powerpoint/2010/main" val="1652448455"/>
       </p:ext>
     </p:extLst>
   </p:cSld>
@@ -4350,7 +4350,7 @@
           <p:cNvPr id="23" name="">
             <a:extLst xmlns:a="http://schemas.openxmlformats.org/drawingml/2006/main">
               <a:ext uri="{FF2B5EF4-FFF2-40B4-BE49-F238E27FC236}">
-                <a16:creationId xmlns:a16="http://schemas.microsoft.com/office/drawing/2014/main" id="{E97F5C38-5F0B-4B54-89EF-6DF586ED1B16}"/>
+                <a16:creationId xmlns:a16="http://schemas.microsoft.com/office/drawing/2014/main" id="{047337AC-5B75-4E0C-AFC3-C74F1A12E791}"/>
               </a:ext>
             </a:extLst>
           </p:cNvPr>
@@ -4382,7 +4382,7 @@
           <p:cNvPr id="2" name="">
             <a:extLst xmlns:a="http://schemas.openxmlformats.org/drawingml/2006/main">
               <a:ext uri="{FF2B5EF4-FFF2-40B4-BE49-F238E27FC236}">
-                <a16:creationId xmlns:a16="http://schemas.microsoft.com/office/drawing/2014/main" id="{BCCCDDDD-FAEA-4935-84CA-C0FCCC8C0EC6}"/>
+                <a16:creationId xmlns:a16="http://schemas.microsoft.com/office/drawing/2014/main" id="{3994FAD6-28C7-4284-97CD-BAB60C61835F}"/>
               </a:ext>
             </a:extLst>
           </p:cNvPr>
@@ -4439,7 +4439,7 @@
           <p:cNvPr id="3" name="">
             <a:extLst xmlns:a="http://schemas.openxmlformats.org/drawingml/2006/main">
               <a:ext uri="{FF2B5EF4-FFF2-40B4-BE49-F238E27FC236}">
-                <a16:creationId xmlns:a16="http://schemas.microsoft.com/office/drawing/2014/main" id="{892D9ACF-DD84-494E-9326-14AB884782B7}"/>
+                <a16:creationId xmlns:a16="http://schemas.microsoft.com/office/drawing/2014/main" id="{9D40CD26-9F9B-4B05-B853-CD211BC92CF9}"/>
               </a:ext>
             </a:extLst>
           </p:cNvPr>
@@ -4471,7 +4471,7 @@
           <p:cNvPr id="4" name="">
             <a:extLst xmlns:a="http://schemas.openxmlformats.org/drawingml/2006/main">
               <a:ext uri="{FF2B5EF4-FFF2-40B4-BE49-F238E27FC236}">
-                <a16:creationId xmlns:a16="http://schemas.microsoft.com/office/drawing/2014/main" id="{F6237FDE-5673-42CA-9654-1EA525B650F5}"/>
+                <a16:creationId xmlns:a16="http://schemas.microsoft.com/office/drawing/2014/main" id="{A018F297-0B74-4386-83FE-1431B2635040}"/>
               </a:ext>
             </a:extLst>
           </p:cNvPr>
@@ -4528,7 +4528,7 @@
           <p:cNvPr id="5" name="">
             <a:extLst xmlns:a="http://schemas.openxmlformats.org/drawingml/2006/main">
               <a:ext uri="{FF2B5EF4-FFF2-40B4-BE49-F238E27FC236}">
-                <a16:creationId xmlns:a16="http://schemas.microsoft.com/office/drawing/2014/main" id="{71CA3F1C-88C7-4C3F-B5F2-32ABFDE674BD}"/>
+                <a16:creationId xmlns:a16="http://schemas.microsoft.com/office/drawing/2014/main" id="{515AB0B3-60F6-4973-A2DF-7215F9FFE6E6}"/>
               </a:ext>
             </a:extLst>
           </p:cNvPr>
@@ -4585,7 +4585,7 @@
           <p:cNvPr id="6" name="">
             <a:extLst xmlns:a="http://schemas.openxmlformats.org/drawingml/2006/main">
               <a:ext uri="{FF2B5EF4-FFF2-40B4-BE49-F238E27FC236}">
-                <a16:creationId xmlns:a16="http://schemas.microsoft.com/office/drawing/2014/main" id="{C6C492D6-1C05-4C3A-831E-4316F796187D}"/>
+                <a16:creationId xmlns:a16="http://schemas.microsoft.com/office/drawing/2014/main" id="{390A8575-1815-4AAE-B1F8-D86C6CE29D40}"/>
               </a:ext>
             </a:extLst>
           </p:cNvPr>
@@ -4642,7 +4642,7 @@
           <p:cNvPr id="7" name="">
             <a:extLst xmlns:a="http://schemas.openxmlformats.org/drawingml/2006/main">
               <a:ext uri="{FF2B5EF4-FFF2-40B4-BE49-F238E27FC236}">
-                <a16:creationId xmlns:a16="http://schemas.microsoft.com/office/drawing/2014/main" id="{138B23C7-623D-4AB1-971D-AB0E877780C0}"/>
+                <a16:creationId xmlns:a16="http://schemas.microsoft.com/office/drawing/2014/main" id="{17A5A2ED-79E8-4247-B218-7EE236E21B8D}"/>
               </a:ext>
             </a:extLst>
           </p:cNvPr>
@@ -4674,7 +4674,7 @@
           <p:cNvPr id="8" name="">
             <a:extLst xmlns:a="http://schemas.openxmlformats.org/drawingml/2006/main">
               <a:ext uri="{FF2B5EF4-FFF2-40B4-BE49-F238E27FC236}">
-                <a16:creationId xmlns:a16="http://schemas.microsoft.com/office/drawing/2014/main" id="{A65D5A07-DD34-4A89-A8BC-F5171C055A63}"/>
+                <a16:creationId xmlns:a16="http://schemas.microsoft.com/office/drawing/2014/main" id="{FC240DD4-EA4C-4E63-8AA5-D2E49ACFF9D1}"/>
               </a:ext>
             </a:extLst>
           </p:cNvPr>
@@ -4731,7 +4731,7 @@
           <p:cNvPr id="9" name="">
             <a:extLst xmlns:a="http://schemas.openxmlformats.org/drawingml/2006/main">
               <a:ext uri="{FF2B5EF4-FFF2-40B4-BE49-F238E27FC236}">
-                <a16:creationId xmlns:a16="http://schemas.microsoft.com/office/drawing/2014/main" id="{043A45C3-BDDB-47D4-B246-C6C050E5D207}"/>
+                <a16:creationId xmlns:a16="http://schemas.microsoft.com/office/drawing/2014/main" id="{49D2DFEB-2D34-48CA-AE48-77D100ABD912}"/>
               </a:ext>
             </a:extLst>
           </p:cNvPr>
@@ -4788,7 +4788,7 @@
           <p:cNvPr id="10" name="">
             <a:extLst xmlns:a="http://schemas.openxmlformats.org/drawingml/2006/main">
               <a:ext uri="{FF2B5EF4-FFF2-40B4-BE49-F238E27FC236}">
-                <a16:creationId xmlns:a16="http://schemas.microsoft.com/office/drawing/2014/main" id="{C9FBF119-1CE2-4A58-AD84-0760E8E29151}"/>
+                <a16:creationId xmlns:a16="http://schemas.microsoft.com/office/drawing/2014/main" id="{D0ED3EBF-26AF-44EC-A3BD-DAA3C29863CB}"/>
               </a:ext>
             </a:extLst>
           </p:cNvPr>
@@ -4822,7 +4822,7 @@
           <p:cNvPr id="11" name="">
             <a:extLst xmlns:a="http://schemas.openxmlformats.org/drawingml/2006/main">
               <a:ext uri="{FF2B5EF4-FFF2-40B4-BE49-F238E27FC236}">
-                <a16:creationId xmlns:a16="http://schemas.microsoft.com/office/drawing/2014/main" id="{C53C305E-D9D7-49BC-8216-911E446C5444}"/>
+                <a16:creationId xmlns:a16="http://schemas.microsoft.com/office/drawing/2014/main" id="{E11F2E76-F415-47B8-8222-09DEFD68FFFF}"/>
               </a:ext>
             </a:extLst>
           </p:cNvPr>
@@ -4854,7 +4854,7 @@
           <p:cNvPr id="12" name="">
             <a:extLst xmlns:a="http://schemas.openxmlformats.org/drawingml/2006/main">
               <a:ext uri="{FF2B5EF4-FFF2-40B4-BE49-F238E27FC236}">
-                <a16:creationId xmlns:a16="http://schemas.microsoft.com/office/drawing/2014/main" id="{5546D1D5-3699-4963-A380-FCA9AB1CD896}"/>
+                <a16:creationId xmlns:a16="http://schemas.microsoft.com/office/drawing/2014/main" id="{C5F3BED0-A989-4125-97E2-4028727D9DEC}"/>
               </a:ext>
             </a:extLst>
           </p:cNvPr>
@@ -4911,7 +4911,7 @@
           <p:cNvPr id="13" name="">
             <a:extLst xmlns:a="http://schemas.openxmlformats.org/drawingml/2006/main">
               <a:ext uri="{FF2B5EF4-FFF2-40B4-BE49-F238E27FC236}">
-                <a16:creationId xmlns:a16="http://schemas.microsoft.com/office/drawing/2014/main" id="{0F48ED80-4C5D-4C9B-8A2A-1B30F1E7D4D3}"/>
+                <a16:creationId xmlns:a16="http://schemas.microsoft.com/office/drawing/2014/main" id="{9C90C077-A916-4D60-A0A4-85D2D38B5A74}"/>
               </a:ext>
             </a:extLst>
           </p:cNvPr>
@@ -4968,7 +4968,7 @@
           <p:cNvPr id="14" name="">
             <a:extLst xmlns:a="http://schemas.openxmlformats.org/drawingml/2006/main">
               <a:ext uri="{FF2B5EF4-FFF2-40B4-BE49-F238E27FC236}">
-                <a16:creationId xmlns:a16="http://schemas.microsoft.com/office/drawing/2014/main" id="{09099F1D-C07D-4DAA-BD4F-532B8980B57A}"/>
+                <a16:creationId xmlns:a16="http://schemas.microsoft.com/office/drawing/2014/main" id="{12AACD93-33F8-4F5A-8846-C2087316D750}"/>
               </a:ext>
             </a:extLst>
           </p:cNvPr>
@@ -5002,7 +5002,7 @@
           <p:cNvPr id="15" name="">
             <a:extLst xmlns:a="http://schemas.openxmlformats.org/drawingml/2006/main">
               <a:ext uri="{FF2B5EF4-FFF2-40B4-BE49-F238E27FC236}">
-                <a16:creationId xmlns:a16="http://schemas.microsoft.com/office/drawing/2014/main" id="{C1AE8996-8157-47D5-B73F-A11FE68F9687}"/>
+                <a16:creationId xmlns:a16="http://schemas.microsoft.com/office/drawing/2014/main" id="{37E0685C-B58D-42B3-91F3-6B99593CE5E5}"/>
               </a:ext>
             </a:extLst>
           </p:cNvPr>
@@ -5034,7 +5034,7 @@
           <p:cNvPr id="16" name="">
             <a:extLst xmlns:a="http://schemas.openxmlformats.org/drawingml/2006/main">
               <a:ext uri="{FF2B5EF4-FFF2-40B4-BE49-F238E27FC236}">
-                <a16:creationId xmlns:a16="http://schemas.microsoft.com/office/drawing/2014/main" id="{AA0E57BA-687E-44A2-AD96-FB8E4B05A5AB}"/>
+                <a16:creationId xmlns:a16="http://schemas.microsoft.com/office/drawing/2014/main" id="{C37D6A3C-9B1C-440A-9146-774C59C3AD7A}"/>
               </a:ext>
             </a:extLst>
           </p:cNvPr>
@@ -5091,7 +5091,7 @@
           <p:cNvPr id="17" name="">
             <a:extLst xmlns:a="http://schemas.openxmlformats.org/drawingml/2006/main">
               <a:ext uri="{FF2B5EF4-FFF2-40B4-BE49-F238E27FC236}">
-                <a16:creationId xmlns:a16="http://schemas.microsoft.com/office/drawing/2014/main" id="{F3B3D7D1-DD82-4F0A-BE95-55F9C4C46559}"/>
+                <a16:creationId xmlns:a16="http://schemas.microsoft.com/office/drawing/2014/main" id="{D1ADA447-1B3E-4A11-A35D-8F7C6E98B292}"/>
               </a:ext>
             </a:extLst>
           </p:cNvPr>
@@ -5148,7 +5148,7 @@
           <p:cNvPr id="18" name="">
             <a:extLst xmlns:a="http://schemas.openxmlformats.org/drawingml/2006/main">
               <a:ext uri="{FF2B5EF4-FFF2-40B4-BE49-F238E27FC236}">
-                <a16:creationId xmlns:a16="http://schemas.microsoft.com/office/drawing/2014/main" id="{34F41A45-DD20-4114-8F4C-3C083E2CB829}"/>
+                <a16:creationId xmlns:a16="http://schemas.microsoft.com/office/drawing/2014/main" id="{EE712BE9-D461-47EA-8540-0ABF9C861F98}"/>
               </a:ext>
             </a:extLst>
           </p:cNvPr>
@@ -5182,7 +5182,7 @@
           <p:cNvPr id="19" name="">
             <a:extLst xmlns:a="http://schemas.openxmlformats.org/drawingml/2006/main">
               <a:ext uri="{FF2B5EF4-FFF2-40B4-BE49-F238E27FC236}">
-                <a16:creationId xmlns:a16="http://schemas.microsoft.com/office/drawing/2014/main" id="{0315B485-1DE9-45A0-BFCD-96512BDF73AB}"/>
+                <a16:creationId xmlns:a16="http://schemas.microsoft.com/office/drawing/2014/main" id="{753E0236-8A07-4A5F-924E-5057EEEF8643}"/>
               </a:ext>
             </a:extLst>
           </p:cNvPr>
@@ -5214,7 +5214,7 @@
           <p:cNvPr id="20" name="">
             <a:extLst xmlns:a="http://schemas.openxmlformats.org/drawingml/2006/main">
               <a:ext uri="{FF2B5EF4-FFF2-40B4-BE49-F238E27FC236}">
-                <a16:creationId xmlns:a16="http://schemas.microsoft.com/office/drawing/2014/main" id="{14B77309-49DA-4278-AD60-25E675D0DFB4}"/>
+                <a16:creationId xmlns:a16="http://schemas.microsoft.com/office/drawing/2014/main" id="{85EEDB22-E872-4E15-B860-98BA7ED000D6}"/>
               </a:ext>
             </a:extLst>
           </p:cNvPr>
@@ -5271,7 +5271,7 @@
           <p:cNvPr id="21" name="">
             <a:extLst xmlns:a="http://schemas.openxmlformats.org/drawingml/2006/main">
               <a:ext uri="{FF2B5EF4-FFF2-40B4-BE49-F238E27FC236}">
-                <a16:creationId xmlns:a16="http://schemas.microsoft.com/office/drawing/2014/main" id="{9D105FEE-01B1-4BE9-B4FA-A198775B1D7D}"/>
+                <a16:creationId xmlns:a16="http://schemas.microsoft.com/office/drawing/2014/main" id="{DFC499AB-E648-4A2F-AA16-4E95364EABD0}"/>
               </a:ext>
             </a:extLst>
           </p:cNvPr>
@@ -5328,7 +5328,7 @@
           <p:cNvPr id="22" name="">
             <a:extLst xmlns:a="http://schemas.openxmlformats.org/drawingml/2006/main">
               <a:ext uri="{FF2B5EF4-FFF2-40B4-BE49-F238E27FC236}">
-                <a16:creationId xmlns:a16="http://schemas.microsoft.com/office/drawing/2014/main" id="{B9EEF897-7077-4FEB-9EB4-EF506B2D0289}"/>
+                <a16:creationId xmlns:a16="http://schemas.microsoft.com/office/drawing/2014/main" id="{C163B90C-BC41-4E4D-8757-6D0F739EC393}"/>
               </a:ext>
             </a:extLst>
           </p:cNvPr>
@@ -5383,7 +5383,7 @@
     </p:spTree>
     <p:extLst>
       <p:ext uri="{BB962C8B-B14F-4D97-AF65-F5344CB8AC3E}">
-        <p14:creationId xmlns:p14="http://schemas.microsoft.com/office/powerpoint/2010/main" val="1769421981"/>
+        <p14:creationId xmlns:p14="http://schemas.microsoft.com/office/powerpoint/2010/main" val="336198141"/>
       </p:ext>
     </p:extLst>
   </p:cSld>
@@ -5584,7 +5584,7 @@
           <p:cNvPr id="23" name="">
             <a:extLst xmlns:a="http://schemas.openxmlformats.org/drawingml/2006/main">
               <a:ext uri="{FF2B5EF4-FFF2-40B4-BE49-F238E27FC236}">
-                <a16:creationId xmlns:a16="http://schemas.microsoft.com/office/drawing/2014/main" id="{EBE39894-E5A4-4BA7-BF79-24D21102A9CA}"/>
+                <a16:creationId xmlns:a16="http://schemas.microsoft.com/office/drawing/2014/main" id="{0A679B44-E918-4295-9819-E4538E9C7131}"/>
               </a:ext>
             </a:extLst>
           </p:cNvPr>
@@ -5616,7 +5616,7 @@
           <p:cNvPr id="2" name="">
             <a:extLst xmlns:a="http://schemas.openxmlformats.org/drawingml/2006/main">
               <a:ext uri="{FF2B5EF4-FFF2-40B4-BE49-F238E27FC236}">
-                <a16:creationId xmlns:a16="http://schemas.microsoft.com/office/drawing/2014/main" id="{94AF616B-1FE0-4B3A-8C5D-A4F1F8C67A16}"/>
+                <a16:creationId xmlns:a16="http://schemas.microsoft.com/office/drawing/2014/main" id="{04C4B22B-38BD-4FF6-94E3-C9C99C627702}"/>
               </a:ext>
             </a:extLst>
           </p:cNvPr>
@@ -5673,7 +5673,7 @@
           <p:cNvPr id="3" name="">
             <a:extLst xmlns:a="http://schemas.openxmlformats.org/drawingml/2006/main">
               <a:ext uri="{FF2B5EF4-FFF2-40B4-BE49-F238E27FC236}">
-                <a16:creationId xmlns:a16="http://schemas.microsoft.com/office/drawing/2014/main" id="{113967A5-8F16-4557-8D4E-D5641B975305}"/>
+                <a16:creationId xmlns:a16="http://schemas.microsoft.com/office/drawing/2014/main" id="{B685F382-27DC-4D15-8BE3-86799F844892}"/>
               </a:ext>
             </a:extLst>
           </p:cNvPr>
@@ -5705,7 +5705,7 @@
           <p:cNvPr id="4" name="">
             <a:extLst xmlns:a="http://schemas.openxmlformats.org/drawingml/2006/main">
               <a:ext uri="{FF2B5EF4-FFF2-40B4-BE49-F238E27FC236}">
-                <a16:creationId xmlns:a16="http://schemas.microsoft.com/office/drawing/2014/main" id="{432AED21-C3CF-4CEE-A859-66A242EE3F32}"/>
+                <a16:creationId xmlns:a16="http://schemas.microsoft.com/office/drawing/2014/main" id="{03EAC6B1-7E65-45A8-AF6B-133ED873D3E2}"/>
               </a:ext>
             </a:extLst>
           </p:cNvPr>
@@ -5762,7 +5762,7 @@
           <p:cNvPr id="5" name="">
             <a:extLst xmlns:a="http://schemas.openxmlformats.org/drawingml/2006/main">
               <a:ext uri="{FF2B5EF4-FFF2-40B4-BE49-F238E27FC236}">
-                <a16:creationId xmlns:a16="http://schemas.microsoft.com/office/drawing/2014/main" id="{26C21B90-45EC-4DA0-A5E0-73D5682EB574}"/>
+                <a16:creationId xmlns:a16="http://schemas.microsoft.com/office/drawing/2014/main" id="{8C394514-894D-4737-9FEB-B8E2178DB974}"/>
               </a:ext>
             </a:extLst>
           </p:cNvPr>
@@ -5819,7 +5819,7 @@
           <p:cNvPr id="6" name="">
             <a:extLst xmlns:a="http://schemas.openxmlformats.org/drawingml/2006/main">
               <a:ext uri="{FF2B5EF4-FFF2-40B4-BE49-F238E27FC236}">
-                <a16:creationId xmlns:a16="http://schemas.microsoft.com/office/drawing/2014/main" id="{8F6F3FC1-0D74-4164-BEF7-F63C78062045}"/>
+                <a16:creationId xmlns:a16="http://schemas.microsoft.com/office/drawing/2014/main" id="{AE558779-8EEE-47ED-B390-05A6AB83DBBE}"/>
               </a:ext>
             </a:extLst>
           </p:cNvPr>
@@ -5876,7 +5876,7 @@
           <p:cNvPr id="7" name="">
             <a:extLst xmlns:a="http://schemas.openxmlformats.org/drawingml/2006/main">
               <a:ext uri="{FF2B5EF4-FFF2-40B4-BE49-F238E27FC236}">
-                <a16:creationId xmlns:a16="http://schemas.microsoft.com/office/drawing/2014/main" id="{62FFEA49-D23B-427E-A6CF-5CB1A3CCF6D2}"/>
+                <a16:creationId xmlns:a16="http://schemas.microsoft.com/office/drawing/2014/main" id="{72F2E13B-F9B7-4222-9D9E-45BB0744E82C}"/>
               </a:ext>
             </a:extLst>
           </p:cNvPr>
@@ -5908,7 +5908,7 @@
           <p:cNvPr id="8" name="">
             <a:extLst xmlns:a="http://schemas.openxmlformats.org/drawingml/2006/main">
               <a:ext uri="{FF2B5EF4-FFF2-40B4-BE49-F238E27FC236}">
-                <a16:creationId xmlns:a16="http://schemas.microsoft.com/office/drawing/2014/main" id="{A6D88C3E-51E6-4E9D-8FF5-191142D1AE08}"/>
+                <a16:creationId xmlns:a16="http://schemas.microsoft.com/office/drawing/2014/main" id="{F24CA3C5-9C33-4A8A-980F-F230374D8415}"/>
               </a:ext>
             </a:extLst>
           </p:cNvPr>
@@ -5965,7 +5965,7 @@
           <p:cNvPr id="9" name="">
             <a:extLst xmlns:a="http://schemas.openxmlformats.org/drawingml/2006/main">
               <a:ext uri="{FF2B5EF4-FFF2-40B4-BE49-F238E27FC236}">
-                <a16:creationId xmlns:a16="http://schemas.microsoft.com/office/drawing/2014/main" id="{3B58BAD4-BF94-4751-99A4-847880CC200B}"/>
+                <a16:creationId xmlns:a16="http://schemas.microsoft.com/office/drawing/2014/main" id="{840FDAA3-DC8C-4D6E-AF05-22DAFB7B833D}"/>
               </a:ext>
             </a:extLst>
           </p:cNvPr>
@@ -6022,7 +6022,7 @@
           <p:cNvPr id="10" name="">
             <a:extLst xmlns:a="http://schemas.openxmlformats.org/drawingml/2006/main">
               <a:ext uri="{FF2B5EF4-FFF2-40B4-BE49-F238E27FC236}">
-                <a16:creationId xmlns:a16="http://schemas.microsoft.com/office/drawing/2014/main" id="{1AD33714-9344-4076-8D45-7B17E1EB1DDA}"/>
+                <a16:creationId xmlns:a16="http://schemas.microsoft.com/office/drawing/2014/main" id="{8CB01DE5-9BA2-4D1E-AF7C-C41ED12DD848}"/>
               </a:ext>
             </a:extLst>
           </p:cNvPr>
@@ -6056,7 +6056,7 @@
           <p:cNvPr id="11" name="">
             <a:extLst xmlns:a="http://schemas.openxmlformats.org/drawingml/2006/main">
               <a:ext uri="{FF2B5EF4-FFF2-40B4-BE49-F238E27FC236}">
-                <a16:creationId xmlns:a16="http://schemas.microsoft.com/office/drawing/2014/main" id="{8BADA535-780B-4DCB-B7E5-A6F2FD42C180}"/>
+                <a16:creationId xmlns:a16="http://schemas.microsoft.com/office/drawing/2014/main" id="{55A8CD64-6942-43D7-9D24-4503C3AA11EE}"/>
               </a:ext>
             </a:extLst>
           </p:cNvPr>
@@ -6088,7 +6088,7 @@
           <p:cNvPr id="12" name="">
             <a:extLst xmlns:a="http://schemas.openxmlformats.org/drawingml/2006/main">
               <a:ext uri="{FF2B5EF4-FFF2-40B4-BE49-F238E27FC236}">
-                <a16:creationId xmlns:a16="http://schemas.microsoft.com/office/drawing/2014/main" id="{B167A040-D28F-44C5-BD09-3364E8B1FE72}"/>
+                <a16:creationId xmlns:a16="http://schemas.microsoft.com/office/drawing/2014/main" id="{B748FA16-9DB5-4EF5-B119-40837817070E}"/>
               </a:ext>
             </a:extLst>
           </p:cNvPr>
@@ -6145,7 +6145,7 @@
           <p:cNvPr id="13" name="">
             <a:extLst xmlns:a="http://schemas.openxmlformats.org/drawingml/2006/main">
               <a:ext uri="{FF2B5EF4-FFF2-40B4-BE49-F238E27FC236}">
-                <a16:creationId xmlns:a16="http://schemas.microsoft.com/office/drawing/2014/main" id="{6533FD6D-BD78-443C-AFF6-61D77778647D}"/>
+                <a16:creationId xmlns:a16="http://schemas.microsoft.com/office/drawing/2014/main" id="{711B0019-7DEF-41EA-BF16-DB42063206D6}"/>
               </a:ext>
             </a:extLst>
           </p:cNvPr>
@@ -6202,7 +6202,7 @@
           <p:cNvPr id="14" name="">
             <a:extLst xmlns:a="http://schemas.openxmlformats.org/drawingml/2006/main">
               <a:ext uri="{FF2B5EF4-FFF2-40B4-BE49-F238E27FC236}">
-                <a16:creationId xmlns:a16="http://schemas.microsoft.com/office/drawing/2014/main" id="{4A9F4C50-1057-468D-AF02-C45B9A716C1B}"/>
+                <a16:creationId xmlns:a16="http://schemas.microsoft.com/office/drawing/2014/main" id="{23A0FA88-DBA7-469F-858F-494180CAF201}"/>
               </a:ext>
             </a:extLst>
           </p:cNvPr>
@@ -6236,7 +6236,7 @@
           <p:cNvPr id="15" name="">
             <a:extLst xmlns:a="http://schemas.openxmlformats.org/drawingml/2006/main">
               <a:ext uri="{FF2B5EF4-FFF2-40B4-BE49-F238E27FC236}">
-                <a16:creationId xmlns:a16="http://schemas.microsoft.com/office/drawing/2014/main" id="{26A8EE55-91D2-4FFB-B57D-1B47344E4A2F}"/>
+                <a16:creationId xmlns:a16="http://schemas.microsoft.com/office/drawing/2014/main" id="{7D56258F-A530-46A8-91B2-5FE965CF42FB}"/>
               </a:ext>
             </a:extLst>
           </p:cNvPr>
@@ -6268,7 +6268,7 @@
           <p:cNvPr id="16" name="">
             <a:extLst xmlns:a="http://schemas.openxmlformats.org/drawingml/2006/main">
               <a:ext uri="{FF2B5EF4-FFF2-40B4-BE49-F238E27FC236}">
-                <a16:creationId xmlns:a16="http://schemas.microsoft.com/office/drawing/2014/main" id="{0BE5B4D0-06CF-4F3C-8705-F6FB37DCC3C8}"/>
+                <a16:creationId xmlns:a16="http://schemas.microsoft.com/office/drawing/2014/main" id="{3143CEB5-4F63-4349-8F0E-3F7BA7222DCA}"/>
               </a:ext>
             </a:extLst>
           </p:cNvPr>
@@ -6325,7 +6325,7 @@
           <p:cNvPr id="17" name="">
             <a:extLst xmlns:a="http://schemas.openxmlformats.org/drawingml/2006/main">
               <a:ext uri="{FF2B5EF4-FFF2-40B4-BE49-F238E27FC236}">
-                <a16:creationId xmlns:a16="http://schemas.microsoft.com/office/drawing/2014/main" id="{20D4EF14-502B-4D05-BF78-AFB7B7FB9A03}"/>
+                <a16:creationId xmlns:a16="http://schemas.microsoft.com/office/drawing/2014/main" id="{CC9180D7-5E23-442A-9A62-B6A64763EB24}"/>
               </a:ext>
             </a:extLst>
           </p:cNvPr>
@@ -6382,7 +6382,7 @@
           <p:cNvPr id="18" name="">
             <a:extLst xmlns:a="http://schemas.openxmlformats.org/drawingml/2006/main">
               <a:ext uri="{FF2B5EF4-FFF2-40B4-BE49-F238E27FC236}">
-                <a16:creationId xmlns:a16="http://schemas.microsoft.com/office/drawing/2014/main" id="{AE232796-F1D2-4161-BD0F-CC6636BD85CE}"/>
+                <a16:creationId xmlns:a16="http://schemas.microsoft.com/office/drawing/2014/main" id="{1CADDFA6-EE06-405B-82B9-D117E5579ED8}"/>
               </a:ext>
             </a:extLst>
           </p:cNvPr>
@@ -6416,7 +6416,7 @@
           <p:cNvPr id="19" name="">
             <a:extLst xmlns:a="http://schemas.openxmlformats.org/drawingml/2006/main">
               <a:ext uri="{FF2B5EF4-FFF2-40B4-BE49-F238E27FC236}">
-                <a16:creationId xmlns:a16="http://schemas.microsoft.com/office/drawing/2014/main" id="{E5B24485-F1DA-4C81-ABEE-A4EDAC1A5DBD}"/>
+                <a16:creationId xmlns:a16="http://schemas.microsoft.com/office/drawing/2014/main" id="{51D4B0F4-DA7F-4007-839F-B271E9FB1229}"/>
               </a:ext>
             </a:extLst>
           </p:cNvPr>
@@ -6448,7 +6448,7 @@
           <p:cNvPr id="20" name="">
             <a:extLst xmlns:a="http://schemas.openxmlformats.org/drawingml/2006/main">
               <a:ext uri="{FF2B5EF4-FFF2-40B4-BE49-F238E27FC236}">
-                <a16:creationId xmlns:a16="http://schemas.microsoft.com/office/drawing/2014/main" id="{3604924C-6009-4860-BBA8-1FFB924B6C9E}"/>
+                <a16:creationId xmlns:a16="http://schemas.microsoft.com/office/drawing/2014/main" id="{A3A77A0A-77C7-4C8B-962E-08DBC6D69C7F}"/>
               </a:ext>
             </a:extLst>
           </p:cNvPr>
@@ -6505,7 +6505,7 @@
           <p:cNvPr id="21" name="">
             <a:extLst xmlns:a="http://schemas.openxmlformats.org/drawingml/2006/main">
               <a:ext uri="{FF2B5EF4-FFF2-40B4-BE49-F238E27FC236}">
-                <a16:creationId xmlns:a16="http://schemas.microsoft.com/office/drawing/2014/main" id="{50ED9951-1979-40BB-B514-C53265D81AA7}"/>
+                <a16:creationId xmlns:a16="http://schemas.microsoft.com/office/drawing/2014/main" id="{BC57DCB8-1DE1-4370-8968-A2A6F9A6E505}"/>
               </a:ext>
             </a:extLst>
           </p:cNvPr>
@@ -6562,7 +6562,7 @@
           <p:cNvPr id="22" name="">
             <a:extLst xmlns:a="http://schemas.openxmlformats.org/drawingml/2006/main">
               <a:ext uri="{FF2B5EF4-FFF2-40B4-BE49-F238E27FC236}">
-                <a16:creationId xmlns:a16="http://schemas.microsoft.com/office/drawing/2014/main" id="{6A4CDEEC-924A-44BC-9089-ABEBEEFDB838}"/>
+                <a16:creationId xmlns:a16="http://schemas.microsoft.com/office/drawing/2014/main" id="{D6CC8498-2C91-4F3D-999F-5E0D882FD52A}"/>
               </a:ext>
             </a:extLst>
           </p:cNvPr>
@@ -6617,7 +6617,7 @@
     </p:spTree>
     <p:extLst>
       <p:ext uri="{BB962C8B-B14F-4D97-AF65-F5344CB8AC3E}">
-        <p14:creationId xmlns:p14="http://schemas.microsoft.com/office/powerpoint/2010/main" val="418140989"/>
+        <p14:creationId xmlns:p14="http://schemas.microsoft.com/office/powerpoint/2010/main" val="147642430"/>
       </p:ext>
     </p:extLst>
   </p:cSld>
@@ -6818,7 +6818,7 @@
           <p:cNvPr id="16" name="">
             <a:extLst xmlns:a="http://schemas.openxmlformats.org/drawingml/2006/main">
               <a:ext uri="{FF2B5EF4-FFF2-40B4-BE49-F238E27FC236}">
-                <a16:creationId xmlns:a16="http://schemas.microsoft.com/office/drawing/2014/main" id="{F8BAA87E-91E5-4E92-86DF-1929755F4984}"/>
+                <a16:creationId xmlns:a16="http://schemas.microsoft.com/office/drawing/2014/main" id="{4769EDB2-6671-476F-BC56-0DDF9D3796C5}"/>
               </a:ext>
             </a:extLst>
           </p:cNvPr>
@@ -6850,7 +6850,7 @@
           <p:cNvPr id="2" name="">
             <a:extLst xmlns:a="http://schemas.openxmlformats.org/drawingml/2006/main">
               <a:ext uri="{FF2B5EF4-FFF2-40B4-BE49-F238E27FC236}">
-                <a16:creationId xmlns:a16="http://schemas.microsoft.com/office/drawing/2014/main" id="{CE237B91-AEBF-4951-8DA1-D284A2A56A28}"/>
+                <a16:creationId xmlns:a16="http://schemas.microsoft.com/office/drawing/2014/main" id="{92BEF769-26D2-4BB4-B767-57999B2D1896}"/>
               </a:ext>
             </a:extLst>
           </p:cNvPr>
@@ -6907,7 +6907,7 @@
           <p:cNvPr id="3" name="">
             <a:extLst xmlns:a="http://schemas.openxmlformats.org/drawingml/2006/main">
               <a:ext uri="{FF2B5EF4-FFF2-40B4-BE49-F238E27FC236}">
-                <a16:creationId xmlns:a16="http://schemas.microsoft.com/office/drawing/2014/main" id="{BDBEF805-C087-4D10-9AE9-15165C8C0DAB}"/>
+                <a16:creationId xmlns:a16="http://schemas.microsoft.com/office/drawing/2014/main" id="{D9053FEB-3D31-4D6F-BF98-C25DC8A070B0}"/>
               </a:ext>
             </a:extLst>
           </p:cNvPr>
@@ -6939,7 +6939,7 @@
           <p:cNvPr id="4" name="">
             <a:extLst xmlns:a="http://schemas.openxmlformats.org/drawingml/2006/main">
               <a:ext uri="{FF2B5EF4-FFF2-40B4-BE49-F238E27FC236}">
-                <a16:creationId xmlns:a16="http://schemas.microsoft.com/office/drawing/2014/main" id="{8FB7D754-002A-4969-8A93-A73498CC25D2}"/>
+                <a16:creationId xmlns:a16="http://schemas.microsoft.com/office/drawing/2014/main" id="{E3CB3892-391B-4D09-A033-E2FC7D4F31E1}"/>
               </a:ext>
             </a:extLst>
           </p:cNvPr>
@@ -6996,7 +6996,7 @@
           <p:cNvPr id="5" name="">
             <a:extLst xmlns:a="http://schemas.openxmlformats.org/drawingml/2006/main">
               <a:ext uri="{FF2B5EF4-FFF2-40B4-BE49-F238E27FC236}">
-                <a16:creationId xmlns:a16="http://schemas.microsoft.com/office/drawing/2014/main" id="{6EB816B3-5C73-44CE-8253-7AED40F20AE9}"/>
+                <a16:creationId xmlns:a16="http://schemas.microsoft.com/office/drawing/2014/main" id="{68ED5A8A-9509-4342-86EB-9A81C28C3DA9}"/>
               </a:ext>
             </a:extLst>
           </p:cNvPr>
@@ -7053,7 +7053,7 @@
           <p:cNvPr id="6" name="">
             <a:extLst xmlns:a="http://schemas.openxmlformats.org/drawingml/2006/main">
               <a:ext uri="{FF2B5EF4-FFF2-40B4-BE49-F238E27FC236}">
-                <a16:creationId xmlns:a16="http://schemas.microsoft.com/office/drawing/2014/main" id="{58BF19FB-26CE-4FC4-906B-1660A1931011}"/>
+                <a16:creationId xmlns:a16="http://schemas.microsoft.com/office/drawing/2014/main" id="{6B17D5D3-3572-4EC6-9398-EB22518E211D}"/>
               </a:ext>
             </a:extLst>
           </p:cNvPr>
@@ -7110,7 +7110,7 @@
           <p:cNvPr id="7" name="">
             <a:extLst xmlns:a="http://schemas.openxmlformats.org/drawingml/2006/main">
               <a:ext uri="{FF2B5EF4-FFF2-40B4-BE49-F238E27FC236}">
-                <a16:creationId xmlns:a16="http://schemas.microsoft.com/office/drawing/2014/main" id="{7FD4B95D-5C4D-4522-B198-BDCF297B2695}"/>
+                <a16:creationId xmlns:a16="http://schemas.microsoft.com/office/drawing/2014/main" id="{A5445C07-C8C7-4229-9DC9-3900D3E839B9}"/>
               </a:ext>
             </a:extLst>
           </p:cNvPr>
@@ -7142,7 +7142,7 @@
           <p:cNvPr id="8" name="">
             <a:extLst xmlns:a="http://schemas.openxmlformats.org/drawingml/2006/main">
               <a:ext uri="{FF2B5EF4-FFF2-40B4-BE49-F238E27FC236}">
-                <a16:creationId xmlns:a16="http://schemas.microsoft.com/office/drawing/2014/main" id="{B25828E9-B005-43B6-A6CA-72857D9C51CA}"/>
+                <a16:creationId xmlns:a16="http://schemas.microsoft.com/office/drawing/2014/main" id="{DA86DC04-CC0F-404D-B8B3-6854452650A9}"/>
               </a:ext>
             </a:extLst>
           </p:cNvPr>
@@ -7199,7 +7199,7 @@
           <p:cNvPr id="9" name="">
             <a:extLst xmlns:a="http://schemas.openxmlformats.org/drawingml/2006/main">
               <a:ext uri="{FF2B5EF4-FFF2-40B4-BE49-F238E27FC236}">
-                <a16:creationId xmlns:a16="http://schemas.microsoft.com/office/drawing/2014/main" id="{16B98FB4-4408-4C26-85C1-4656722739E0}"/>
+                <a16:creationId xmlns:a16="http://schemas.microsoft.com/office/drawing/2014/main" id="{5EFBA108-2623-4E91-A2D8-7975BF4C7DF3}"/>
               </a:ext>
             </a:extLst>
           </p:cNvPr>
@@ -7256,7 +7256,7 @@
           <p:cNvPr id="10" name="">
             <a:extLst xmlns:a="http://schemas.openxmlformats.org/drawingml/2006/main">
               <a:ext uri="{FF2B5EF4-FFF2-40B4-BE49-F238E27FC236}">
-                <a16:creationId xmlns:a16="http://schemas.microsoft.com/office/drawing/2014/main" id="{7F1CB8FB-936B-4CD0-861A-0EB8783CB32C}"/>
+                <a16:creationId xmlns:a16="http://schemas.microsoft.com/office/drawing/2014/main" id="{B1437293-A68A-4087-9E56-DC527898C05D}"/>
               </a:ext>
             </a:extLst>
           </p:cNvPr>
@@ -7313,7 +7313,7 @@
           <p:cNvPr id="11" name="">
             <a:extLst xmlns:a="http://schemas.openxmlformats.org/drawingml/2006/main">
               <a:ext uri="{FF2B5EF4-FFF2-40B4-BE49-F238E27FC236}">
-                <a16:creationId xmlns:a16="http://schemas.microsoft.com/office/drawing/2014/main" id="{7F70F53B-998B-49E9-82FC-554B8C74EC20}"/>
+                <a16:creationId xmlns:a16="http://schemas.microsoft.com/office/drawing/2014/main" id="{D9B352ED-6166-4680-A8C1-27B06238F8DD}"/>
               </a:ext>
             </a:extLst>
           </p:cNvPr>
@@ -7345,7 +7345,7 @@
           <p:cNvPr id="12" name="">
             <a:extLst xmlns:a="http://schemas.openxmlformats.org/drawingml/2006/main">
               <a:ext uri="{FF2B5EF4-FFF2-40B4-BE49-F238E27FC236}">
-                <a16:creationId xmlns:a16="http://schemas.microsoft.com/office/drawing/2014/main" id="{37C6631F-12E2-455A-9CA8-C5A48897A75E}"/>
+                <a16:creationId xmlns:a16="http://schemas.microsoft.com/office/drawing/2014/main" id="{D38F3372-E4C9-4EF8-BC5E-66930CF7F790}"/>
               </a:ext>
             </a:extLst>
           </p:cNvPr>
@@ -7402,7 +7402,7 @@
           <p:cNvPr id="13" name="">
             <a:extLst xmlns:a="http://schemas.openxmlformats.org/drawingml/2006/main">
               <a:ext uri="{FF2B5EF4-FFF2-40B4-BE49-F238E27FC236}">
-                <a16:creationId xmlns:a16="http://schemas.microsoft.com/office/drawing/2014/main" id="{820A108C-3835-41AC-B9F0-8940F5986C6B}"/>
+                <a16:creationId xmlns:a16="http://schemas.microsoft.com/office/drawing/2014/main" id="{B1BD72FB-BA5D-4F7E-8B67-CD96FCFB4010}"/>
               </a:ext>
             </a:extLst>
           </p:cNvPr>
@@ -7459,7 +7459,7 @@
           <p:cNvPr id="14" name="">
             <a:extLst xmlns:a="http://schemas.openxmlformats.org/drawingml/2006/main">
               <a:ext uri="{FF2B5EF4-FFF2-40B4-BE49-F238E27FC236}">
-                <a16:creationId xmlns:a16="http://schemas.microsoft.com/office/drawing/2014/main" id="{2C418527-5035-4C9F-9B3C-8C252691268C}"/>
+                <a16:creationId xmlns:a16="http://schemas.microsoft.com/office/drawing/2014/main" id="{59B2B96A-5231-400C-9E17-517F3D1326EA}"/>
               </a:ext>
             </a:extLst>
           </p:cNvPr>
@@ -7516,7 +7516,7 @@
           <p:cNvPr id="15" name="">
             <a:extLst xmlns:a="http://schemas.openxmlformats.org/drawingml/2006/main">
               <a:ext uri="{FF2B5EF4-FFF2-40B4-BE49-F238E27FC236}">
-                <a16:creationId xmlns:a16="http://schemas.microsoft.com/office/drawing/2014/main" id="{F689BA5A-50F7-40AE-BC61-BFB86D133AF8}"/>
+                <a16:creationId xmlns:a16="http://schemas.microsoft.com/office/drawing/2014/main" id="{D4FD8919-83C9-467F-A33C-D917C68C71B4}"/>
               </a:ext>
             </a:extLst>
           </p:cNvPr>
@@ -7571,7 +7571,7 @@
     </p:spTree>
     <p:extLst>
       <p:ext uri="{BB962C8B-B14F-4D97-AF65-F5344CB8AC3E}">
-        <p14:creationId xmlns:p14="http://schemas.microsoft.com/office/powerpoint/2010/main" val="1217925856"/>
+        <p14:creationId xmlns:p14="http://schemas.microsoft.com/office/powerpoint/2010/main" val="1852173944"/>
       </p:ext>
     </p:extLst>
   </p:cSld>
@@ -7772,7 +7772,7 @@
           <p:cNvPr id="23" name="">
             <a:extLst xmlns:a="http://schemas.openxmlformats.org/drawingml/2006/main">
               <a:ext uri="{FF2B5EF4-FFF2-40B4-BE49-F238E27FC236}">
-                <a16:creationId xmlns:a16="http://schemas.microsoft.com/office/drawing/2014/main" id="{FB36110A-F140-4B1D-9E6B-7FCBC0A1CAD4}"/>
+                <a16:creationId xmlns:a16="http://schemas.microsoft.com/office/drawing/2014/main" id="{7E5BE5B3-EC07-4982-8AA2-70A3097195B9}"/>
               </a:ext>
             </a:extLst>
           </p:cNvPr>
@@ -7804,7 +7804,7 @@
           <p:cNvPr id="2" name="">
             <a:extLst xmlns:a="http://schemas.openxmlformats.org/drawingml/2006/main">
               <a:ext uri="{FF2B5EF4-FFF2-40B4-BE49-F238E27FC236}">
-                <a16:creationId xmlns:a16="http://schemas.microsoft.com/office/drawing/2014/main" id="{EAF57978-74D4-4205-9060-2A8473BAE1EB}"/>
+                <a16:creationId xmlns:a16="http://schemas.microsoft.com/office/drawing/2014/main" id="{16D7FF9B-5D14-4535-982F-4912CF3EEB2A}"/>
               </a:ext>
             </a:extLst>
           </p:cNvPr>
@@ -7861,7 +7861,7 @@
           <p:cNvPr id="3" name="">
             <a:extLst xmlns:a="http://schemas.openxmlformats.org/drawingml/2006/main">
               <a:ext uri="{FF2B5EF4-FFF2-40B4-BE49-F238E27FC236}">
-                <a16:creationId xmlns:a16="http://schemas.microsoft.com/office/drawing/2014/main" id="{208C1898-95AD-45DA-8DE0-C8B95001930C}"/>
+                <a16:creationId xmlns:a16="http://schemas.microsoft.com/office/drawing/2014/main" id="{D49FED44-94EB-447E-92F2-800DA5DDF795}"/>
               </a:ext>
             </a:extLst>
           </p:cNvPr>
@@ -7893,7 +7893,7 @@
           <p:cNvPr id="4" name="">
             <a:extLst xmlns:a="http://schemas.openxmlformats.org/drawingml/2006/main">
               <a:ext uri="{FF2B5EF4-FFF2-40B4-BE49-F238E27FC236}">
-                <a16:creationId xmlns:a16="http://schemas.microsoft.com/office/drawing/2014/main" id="{37CC629E-C0EE-407E-A584-C092171A7E17}"/>
+                <a16:creationId xmlns:a16="http://schemas.microsoft.com/office/drawing/2014/main" id="{82FD7D94-B259-4EF4-9E73-E0A84979D29F}"/>
               </a:ext>
             </a:extLst>
           </p:cNvPr>
@@ -7950,7 +7950,7 @@
           <p:cNvPr id="5" name="">
             <a:extLst xmlns:a="http://schemas.openxmlformats.org/drawingml/2006/main">
               <a:ext uri="{FF2B5EF4-FFF2-40B4-BE49-F238E27FC236}">
-                <a16:creationId xmlns:a16="http://schemas.microsoft.com/office/drawing/2014/main" id="{98776E0F-C175-4F48-B9C2-E7D43E955359}"/>
+                <a16:creationId xmlns:a16="http://schemas.microsoft.com/office/drawing/2014/main" id="{73349A88-9CED-486C-8867-B1127B7227EA}"/>
               </a:ext>
             </a:extLst>
           </p:cNvPr>
@@ -8007,7 +8007,7 @@
           <p:cNvPr id="6" name="">
             <a:extLst xmlns:a="http://schemas.openxmlformats.org/drawingml/2006/main">
               <a:ext uri="{FF2B5EF4-FFF2-40B4-BE49-F238E27FC236}">
-                <a16:creationId xmlns:a16="http://schemas.microsoft.com/office/drawing/2014/main" id="{8501AA7A-CD42-4826-BE82-DBC5AB02EBE2}"/>
+                <a16:creationId xmlns:a16="http://schemas.microsoft.com/office/drawing/2014/main" id="{805D2DFA-29B6-4AC6-A909-FBE19CF33F60}"/>
               </a:ext>
             </a:extLst>
           </p:cNvPr>
@@ -8064,7 +8064,7 @@
           <p:cNvPr id="7" name="">
             <a:extLst xmlns:a="http://schemas.openxmlformats.org/drawingml/2006/main">
               <a:ext uri="{FF2B5EF4-FFF2-40B4-BE49-F238E27FC236}">
-                <a16:creationId xmlns:a16="http://schemas.microsoft.com/office/drawing/2014/main" id="{6F999C98-46B1-4F42-A8C3-1F2FF9839549}"/>
+                <a16:creationId xmlns:a16="http://schemas.microsoft.com/office/drawing/2014/main" id="{1508EE65-0ED2-43B7-9BAB-1A46A2F618B3}"/>
               </a:ext>
             </a:extLst>
           </p:cNvPr>
@@ -8096,7 +8096,7 @@
           <p:cNvPr id="8" name="">
             <a:extLst xmlns:a="http://schemas.openxmlformats.org/drawingml/2006/main">
               <a:ext uri="{FF2B5EF4-FFF2-40B4-BE49-F238E27FC236}">
-                <a16:creationId xmlns:a16="http://schemas.microsoft.com/office/drawing/2014/main" id="{31D24F61-BE84-4F40-875F-14CB99DB25D8}"/>
+                <a16:creationId xmlns:a16="http://schemas.microsoft.com/office/drawing/2014/main" id="{A23AE67F-FB59-45BD-9107-1A6378B6407B}"/>
               </a:ext>
             </a:extLst>
           </p:cNvPr>
@@ -8153,7 +8153,7 @@
           <p:cNvPr id="9" name="">
             <a:extLst xmlns:a="http://schemas.openxmlformats.org/drawingml/2006/main">
               <a:ext uri="{FF2B5EF4-FFF2-40B4-BE49-F238E27FC236}">
-                <a16:creationId xmlns:a16="http://schemas.microsoft.com/office/drawing/2014/main" id="{F4DEA523-1EE0-4645-82C7-09809B1D2F7D}"/>
+                <a16:creationId xmlns:a16="http://schemas.microsoft.com/office/drawing/2014/main" id="{006F2C8D-1B27-4A73-9A70-3DB2612892E9}"/>
               </a:ext>
             </a:extLst>
           </p:cNvPr>
@@ -8210,19 +8210,19 @@
           <p:cNvPr id="10" name="">
             <a:extLst xmlns:a="http://schemas.openxmlformats.org/drawingml/2006/main">
               <a:ext uri="{FF2B5EF4-FFF2-40B4-BE49-F238E27FC236}">
-                <a16:creationId xmlns:a16="http://schemas.microsoft.com/office/drawing/2014/main" id="{F12C08A2-1F33-4C55-84D4-366AAE2F8164}"/>
-              </a:ext>
-            </a:extLst>
-          </p:cNvPr>
-          <p:cNvSpPr>
-            <a:spLocks xmlns:a="http://schemas.openxmlformats.org/drawingml/2006/main" noGrp="1"/>
-          </p:cNvSpPr>
-          <p:nvPr/>
-        </p:nvSpPr>
-        <p:spPr>
-          <a:xfrm xmlns:a="http://schemas.openxmlformats.org/drawingml/2006/main">
-            <a:off x="914400" y="1257300"/>
-            <a:ext cx="10363200" cy="781050"/>
+                <a16:creationId xmlns:a16="http://schemas.microsoft.com/office/drawing/2014/main" id="{25B652CB-6582-4E89-95BB-35C1CBA51E17}"/>
+              </a:ext>
+            </a:extLst>
+          </p:cNvPr>
+          <p:cNvSpPr>
+            <a:spLocks xmlns:a="http://schemas.openxmlformats.org/drawingml/2006/main" noGrp="1"/>
+          </p:cNvSpPr>
+          <p:nvPr/>
+        </p:nvSpPr>
+        <p:spPr>
+          <a:xfrm xmlns:a="http://schemas.openxmlformats.org/drawingml/2006/main">
+            <a:off x="857250" y="1219200"/>
+            <a:ext cx="10477500" cy="742950"/>
           </a:xfrm>
           <a:prstGeom xmlns:a="http://schemas.openxmlformats.org/drawingml/2006/main" prst="rect">
             <a:avLst/>
@@ -8239,7 +8239,7 @@
           <a:lstStyle xmlns:a="http://schemas.openxmlformats.org/drawingml/2006/main"/>
           <a:p xmlns:a="http://schemas.openxmlformats.org/drawingml/2006/main">
             <a:pPr algn="ctr">
-              <a:defRPr sz="2175" b="1">
+              <a:defRPr sz="2100" b="1">
                 <a:solidFill>
                   <a:srgbClr val="17253A"/>
                 </a:solidFill>
@@ -8249,7 +8249,7 @@
               </a:defRPr>
             </a:pPr>
             <a:r>
-              <a:rPr sz="2175" b="1">
+              <a:rPr sz="2100" b="1">
                 <a:solidFill>
                   <a:srgbClr val="17253A"/>
                 </a:solidFill>
@@ -8267,28 +8267,30 @@
           <p:cNvPr id="11" name="">
             <a:extLst xmlns:a="http://schemas.openxmlformats.org/drawingml/2006/main">
               <a:ext uri="{FF2B5EF4-FFF2-40B4-BE49-F238E27FC236}">
-                <a16:creationId xmlns:a16="http://schemas.microsoft.com/office/drawing/2014/main" id="{D6CA5ECF-A98F-4840-85CA-991D30D13929}"/>
-              </a:ext>
-            </a:extLst>
-          </p:cNvPr>
-          <p:cNvSpPr>
-            <a:spLocks xmlns:a="http://schemas.openxmlformats.org/drawingml/2006/main" noGrp="1"/>
-          </p:cNvSpPr>
-          <p:nvPr/>
-        </p:nvSpPr>
-        <p:spPr>
-          <a:xfrm xmlns:a="http://schemas.openxmlformats.org/drawingml/2006/main">
-            <a:off x="1000125" y="2247900"/>
-            <a:ext cx="476250" cy="476250"/>
-          </a:xfrm>
-          <a:prstGeom xmlns:a="http://schemas.openxmlformats.org/drawingml/2006/main" prst="ellipse">
+                <a16:creationId xmlns:a16="http://schemas.microsoft.com/office/drawing/2014/main" id="{014EE39B-E09E-4C96-8DFA-BAAB83AFEBE8}"/>
+              </a:ext>
+            </a:extLst>
+          </p:cNvPr>
+          <p:cNvSpPr>
+            <a:spLocks xmlns:a="http://schemas.openxmlformats.org/drawingml/2006/main" noGrp="1"/>
+          </p:cNvSpPr>
+          <p:nvPr/>
+        </p:nvSpPr>
+        <p:spPr>
+          <a:xfrm xmlns:a="http://schemas.openxmlformats.org/drawingml/2006/main">
+            <a:off x="971550" y="2124075"/>
+            <a:ext cx="38100" cy="3524250"/>
+          </a:xfrm>
+          <a:prstGeom xmlns:a="http://schemas.openxmlformats.org/drawingml/2006/main" prst="rect">
             <a:avLst/>
           </a:prstGeom>
           <a:solidFill xmlns:a="http://schemas.openxmlformats.org/drawingml/2006/main">
-            <a:srgbClr val="18324A"/>
+            <a:srgbClr val="2C6E73"/>
           </a:solidFill>
           <a:ln xmlns:a="http://schemas.openxmlformats.org/drawingml/2006/main" w="0">
-            <a:noFill/>
+            <a:solidFill>
+              <a:srgbClr val="2C6E73"/>
+            </a:solidFill>
           </a:ln>
         </p:spPr>
       </p:sp>
@@ -8297,19 +8299,19 @@
           <p:cNvPr id="12" name="">
             <a:extLst xmlns:a="http://schemas.openxmlformats.org/drawingml/2006/main">
               <a:ext uri="{FF2B5EF4-FFF2-40B4-BE49-F238E27FC236}">
-                <a16:creationId xmlns:a16="http://schemas.microsoft.com/office/drawing/2014/main" id="{D820F19A-D865-487A-A205-4FD624002C44}"/>
-              </a:ext>
-            </a:extLst>
-          </p:cNvPr>
-          <p:cNvSpPr>
-            <a:spLocks xmlns:a="http://schemas.openxmlformats.org/drawingml/2006/main" noGrp="1"/>
-          </p:cNvSpPr>
-          <p:nvPr/>
-        </p:nvSpPr>
-        <p:spPr>
-          <a:xfrm xmlns:a="http://schemas.openxmlformats.org/drawingml/2006/main">
-            <a:off x="1000125" y="2276475"/>
-            <a:ext cx="476250" cy="419100"/>
+                <a16:creationId xmlns:a16="http://schemas.microsoft.com/office/drawing/2014/main" id="{0E416173-9E85-4824-AB4B-D178E2F30A6A}"/>
+              </a:ext>
+            </a:extLst>
+          </p:cNvPr>
+          <p:cNvSpPr>
+            <a:spLocks xmlns:a="http://schemas.openxmlformats.org/drawingml/2006/main" noGrp="1"/>
+          </p:cNvSpPr>
+          <p:nvPr/>
+        </p:nvSpPr>
+        <p:spPr>
+          <a:xfrm xmlns:a="http://schemas.openxmlformats.org/drawingml/2006/main">
+            <a:off x="1162050" y="2200275"/>
+            <a:ext cx="400050" cy="400050"/>
           </a:xfrm>
           <a:prstGeom xmlns:a="http://schemas.openxmlformats.org/drawingml/2006/main" prst="rect">
             <a:avLst/>
@@ -8326,9 +8328,9 @@
           <a:lstStyle xmlns:a="http://schemas.openxmlformats.org/drawingml/2006/main"/>
           <a:p xmlns:a="http://schemas.openxmlformats.org/drawingml/2006/main">
             <a:pPr algn="ctr">
-              <a:defRPr sz="1350" b="1">
-                <a:solidFill>
-                  <a:srgbClr val="FFFFFF"/>
+              <a:defRPr sz="1125" b="1">
+                <a:solidFill>
+                  <a:srgbClr val="2C6E73"/>
                 </a:solidFill>
                 <a:latin typeface="Arial"/>
                 <a:ea typeface="Arial"/>
@@ -8336,9 +8338,9 @@
               </a:defRPr>
             </a:pPr>
             <a:r>
-              <a:rPr sz="1350" b="1">
-                <a:solidFill>
-                  <a:srgbClr val="FFFFFF"/>
+              <a:rPr sz="1125" b="1">
+                <a:solidFill>
+                  <a:srgbClr val="2C6E73"/>
                 </a:solidFill>
                 <a:latin typeface="Arial"/>
                 <a:ea typeface="Arial"/>
@@ -8354,19 +8356,19 @@
           <p:cNvPr id="13" name="">
             <a:extLst xmlns:a="http://schemas.openxmlformats.org/drawingml/2006/main">
               <a:ext uri="{FF2B5EF4-FFF2-40B4-BE49-F238E27FC236}">
-                <a16:creationId xmlns:a16="http://schemas.microsoft.com/office/drawing/2014/main" id="{70B45CA0-B51B-44FC-80C9-C5D4C76DE2AE}"/>
-              </a:ext>
-            </a:extLst>
-          </p:cNvPr>
-          <p:cNvSpPr>
-            <a:spLocks xmlns:a="http://schemas.openxmlformats.org/drawingml/2006/main" noGrp="1"/>
-          </p:cNvSpPr>
-          <p:nvPr/>
-        </p:nvSpPr>
-        <p:spPr>
-          <a:xfrm xmlns:a="http://schemas.openxmlformats.org/drawingml/2006/main">
-            <a:off x="1714500" y="2181225"/>
-            <a:ext cx="9429750" cy="609600"/>
+                <a16:creationId xmlns:a16="http://schemas.microsoft.com/office/drawing/2014/main" id="{BC7EB99E-0CF7-4152-A02F-99FC3D1D1E6E}"/>
+              </a:ext>
+            </a:extLst>
+          </p:cNvPr>
+          <p:cNvSpPr>
+            <a:spLocks xmlns:a="http://schemas.openxmlformats.org/drawingml/2006/main" noGrp="1"/>
+          </p:cNvSpPr>
+          <p:nvPr/>
+        </p:nvSpPr>
+        <p:spPr>
+          <a:xfrm xmlns:a="http://schemas.openxmlformats.org/drawingml/2006/main">
+            <a:off x="1714500" y="2114550"/>
+            <a:ext cx="9525000" cy="809625"/>
           </a:xfrm>
           <a:prstGeom xmlns:a="http://schemas.openxmlformats.org/drawingml/2006/main" prst="rect">
             <a:avLst/>
@@ -8383,7 +8385,7 @@
           <a:lstStyle xmlns:a="http://schemas.openxmlformats.org/drawingml/2006/main"/>
           <a:p xmlns:a="http://schemas.openxmlformats.org/drawingml/2006/main">
             <a:pPr algn="l">
-              <a:defRPr sz="1500" b="0">
+              <a:defRPr sz="1725" b="0">
                 <a:solidFill>
                   <a:srgbClr val="17253A"/>
                 </a:solidFill>
@@ -8393,7 +8395,7 @@
               </a:defRPr>
             </a:pPr>
             <a:r>
-              <a:rPr sz="1500" b="0">
+              <a:rPr sz="1725" b="0">
                 <a:solidFill>
                   <a:srgbClr val="17253A"/>
                 </a:solidFill>
@@ -8401,7 +8403,7 @@
                 <a:ea typeface="Arial"/>
                 <a:cs typeface="Arial"/>
               </a:rPr>
-              <a:t>Identify the structure: Mark known properties and angle facts on the diagram.</a:t>
+              <a:t>Radius = 4.5 cm</a:t>
             </a:r>
           </a:p>
         </p:txBody>
@@ -8411,28 +8413,30 @@
           <p:cNvPr id="14" name="">
             <a:extLst xmlns:a="http://schemas.openxmlformats.org/drawingml/2006/main">
               <a:ext uri="{FF2B5EF4-FFF2-40B4-BE49-F238E27FC236}">
-                <a16:creationId xmlns:a16="http://schemas.microsoft.com/office/drawing/2014/main" id="{C6E73D1C-B402-4E51-8138-A711392BDBC9}"/>
-              </a:ext>
-            </a:extLst>
-          </p:cNvPr>
-          <p:cNvSpPr>
-            <a:spLocks xmlns:a="http://schemas.openxmlformats.org/drawingml/2006/main" noGrp="1"/>
-          </p:cNvSpPr>
-          <p:nvPr/>
-        </p:nvSpPr>
-        <p:spPr>
-          <a:xfrm xmlns:a="http://schemas.openxmlformats.org/drawingml/2006/main">
-            <a:off x="1000125" y="2990850"/>
-            <a:ext cx="476250" cy="476250"/>
-          </a:xfrm>
-          <a:prstGeom xmlns:a="http://schemas.openxmlformats.org/drawingml/2006/main" prst="ellipse">
+                <a16:creationId xmlns:a16="http://schemas.microsoft.com/office/drawing/2014/main" id="{A9E546F3-9422-4100-8485-2BDCAF6002BB}"/>
+              </a:ext>
+            </a:extLst>
+          </p:cNvPr>
+          <p:cNvSpPr>
+            <a:spLocks xmlns:a="http://schemas.openxmlformats.org/drawingml/2006/main" noGrp="1"/>
+          </p:cNvSpPr>
+          <p:nvPr/>
+        </p:nvSpPr>
+        <p:spPr>
+          <a:xfrm xmlns:a="http://schemas.openxmlformats.org/drawingml/2006/main">
+            <a:off x="1714500" y="2943225"/>
+            <a:ext cx="9334500" cy="9525"/>
+          </a:xfrm>
+          <a:prstGeom xmlns:a="http://schemas.openxmlformats.org/drawingml/2006/main" prst="rect">
             <a:avLst/>
           </a:prstGeom>
           <a:solidFill xmlns:a="http://schemas.openxmlformats.org/drawingml/2006/main">
-            <a:srgbClr val="2C6E73"/>
+            <a:srgbClr val="D9E0E6"/>
           </a:solidFill>
           <a:ln xmlns:a="http://schemas.openxmlformats.org/drawingml/2006/main" w="0">
-            <a:noFill/>
+            <a:solidFill>
+              <a:srgbClr val="D9E0E6"/>
+            </a:solidFill>
           </a:ln>
         </p:spPr>
       </p:sp>
@@ -8441,19 +8445,19 @@
           <p:cNvPr id="15" name="">
             <a:extLst xmlns:a="http://schemas.openxmlformats.org/drawingml/2006/main">
               <a:ext uri="{FF2B5EF4-FFF2-40B4-BE49-F238E27FC236}">
-                <a16:creationId xmlns:a16="http://schemas.microsoft.com/office/drawing/2014/main" id="{19A4F7B2-60F5-4592-A769-A69D9A830502}"/>
-              </a:ext>
-            </a:extLst>
-          </p:cNvPr>
-          <p:cNvSpPr>
-            <a:spLocks xmlns:a="http://schemas.openxmlformats.org/drawingml/2006/main" noGrp="1"/>
-          </p:cNvSpPr>
-          <p:nvPr/>
-        </p:nvSpPr>
-        <p:spPr>
-          <a:xfrm xmlns:a="http://schemas.openxmlformats.org/drawingml/2006/main">
-            <a:off x="1000125" y="3019425"/>
-            <a:ext cx="476250" cy="419100"/>
+                <a16:creationId xmlns:a16="http://schemas.microsoft.com/office/drawing/2014/main" id="{84F8B98A-47D1-4A4A-82DA-8EBDEB36FD9D}"/>
+              </a:ext>
+            </a:extLst>
+          </p:cNvPr>
+          <p:cNvSpPr>
+            <a:spLocks xmlns:a="http://schemas.openxmlformats.org/drawingml/2006/main" noGrp="1"/>
+          </p:cNvSpPr>
+          <p:nvPr/>
+        </p:nvSpPr>
+        <p:spPr>
+          <a:xfrm xmlns:a="http://schemas.openxmlformats.org/drawingml/2006/main">
+            <a:off x="1162050" y="3076575"/>
+            <a:ext cx="400050" cy="400050"/>
           </a:xfrm>
           <a:prstGeom xmlns:a="http://schemas.openxmlformats.org/drawingml/2006/main" prst="rect">
             <a:avLst/>
@@ -8470,9 +8474,9 @@
           <a:lstStyle xmlns:a="http://schemas.openxmlformats.org/drawingml/2006/main"/>
           <a:p xmlns:a="http://schemas.openxmlformats.org/drawingml/2006/main">
             <a:pPr algn="ctr">
-              <a:defRPr sz="1350" b="1">
-                <a:solidFill>
-                  <a:srgbClr val="FFFFFF"/>
+              <a:defRPr sz="1125" b="1">
+                <a:solidFill>
+                  <a:srgbClr val="2C6E73"/>
                 </a:solidFill>
                 <a:latin typeface="Arial"/>
                 <a:ea typeface="Arial"/>
@@ -8480,9 +8484,9 @@
               </a:defRPr>
             </a:pPr>
             <a:r>
-              <a:rPr sz="1350" b="1">
-                <a:solidFill>
-                  <a:srgbClr val="FFFFFF"/>
+              <a:rPr sz="1125" b="1">
+                <a:solidFill>
+                  <a:srgbClr val="2C6E73"/>
                 </a:solidFill>
                 <a:latin typeface="Arial"/>
                 <a:ea typeface="Arial"/>
@@ -8498,19 +8502,19 @@
           <p:cNvPr id="16" name="">
             <a:extLst xmlns:a="http://schemas.openxmlformats.org/drawingml/2006/main">
               <a:ext uri="{FF2B5EF4-FFF2-40B4-BE49-F238E27FC236}">
-                <a16:creationId xmlns:a16="http://schemas.microsoft.com/office/drawing/2014/main" id="{6DAED3D8-96F5-43DE-AAD2-D39423AA5C64}"/>
-              </a:ext>
-            </a:extLst>
-          </p:cNvPr>
-          <p:cNvSpPr>
-            <a:spLocks xmlns:a="http://schemas.openxmlformats.org/drawingml/2006/main" noGrp="1"/>
-          </p:cNvSpPr>
-          <p:nvPr/>
-        </p:nvSpPr>
-        <p:spPr>
-          <a:xfrm xmlns:a="http://schemas.openxmlformats.org/drawingml/2006/main">
-            <a:off x="1714500" y="2924175"/>
-            <a:ext cx="9429750" cy="609600"/>
+                <a16:creationId xmlns:a16="http://schemas.microsoft.com/office/drawing/2014/main" id="{10759F4C-931C-4F5D-9BF1-E22EF36A4214}"/>
+              </a:ext>
+            </a:extLst>
+          </p:cNvPr>
+          <p:cNvSpPr>
+            <a:spLocks xmlns:a="http://schemas.openxmlformats.org/drawingml/2006/main" noGrp="1"/>
+          </p:cNvSpPr>
+          <p:nvPr/>
+        </p:nvSpPr>
+        <p:spPr>
+          <a:xfrm xmlns:a="http://schemas.openxmlformats.org/drawingml/2006/main">
+            <a:off x="1714500" y="2990850"/>
+            <a:ext cx="9525000" cy="809625"/>
           </a:xfrm>
           <a:prstGeom xmlns:a="http://schemas.openxmlformats.org/drawingml/2006/main" prst="rect">
             <a:avLst/>
@@ -8527,7 +8531,7 @@
           <a:lstStyle xmlns:a="http://schemas.openxmlformats.org/drawingml/2006/main"/>
           <a:p xmlns:a="http://schemas.openxmlformats.org/drawingml/2006/main">
             <a:pPr algn="l">
-              <a:defRPr sz="1500" b="0">
+              <a:defRPr sz="1725" b="0">
                 <a:solidFill>
                   <a:srgbClr val="17253A"/>
                 </a:solidFill>
@@ -8537,7 +8541,7 @@
               </a:defRPr>
             </a:pPr>
             <a:r>
-              <a:rPr sz="1500" b="0">
+              <a:rPr sz="1725" b="0">
                 <a:solidFill>
                   <a:srgbClr val="17253A"/>
                 </a:solidFill>
@@ -8545,7 +8549,7 @@
                 <a:ea typeface="Arial"/>
                 <a:cs typeface="Arial"/>
               </a:rPr>
-              <a:t>Set up the method: Form a calculation using angles on a line, around a point or inside a shape.</a:t>
+              <a:t>Diameter = 2 × radius</a:t>
             </a:r>
           </a:p>
         </p:txBody>
@@ -8555,28 +8559,30 @@
           <p:cNvPr id="17" name="">
             <a:extLst xmlns:a="http://schemas.openxmlformats.org/drawingml/2006/main">
               <a:ext uri="{FF2B5EF4-FFF2-40B4-BE49-F238E27FC236}">
-                <a16:creationId xmlns:a16="http://schemas.microsoft.com/office/drawing/2014/main" id="{9EF919D4-5027-48CC-AFDD-813AECABB181}"/>
-              </a:ext>
-            </a:extLst>
-          </p:cNvPr>
-          <p:cNvSpPr>
-            <a:spLocks xmlns:a="http://schemas.openxmlformats.org/drawingml/2006/main" noGrp="1"/>
-          </p:cNvSpPr>
-          <p:nvPr/>
-        </p:nvSpPr>
-        <p:spPr>
-          <a:xfrm xmlns:a="http://schemas.openxmlformats.org/drawingml/2006/main">
-            <a:off x="1000125" y="3733800"/>
-            <a:ext cx="476250" cy="476250"/>
-          </a:xfrm>
-          <a:prstGeom xmlns:a="http://schemas.openxmlformats.org/drawingml/2006/main" prst="ellipse">
+                <a16:creationId xmlns:a16="http://schemas.microsoft.com/office/drawing/2014/main" id="{A80E6FB6-8DDF-43C3-81B3-60CCE178935F}"/>
+              </a:ext>
+            </a:extLst>
+          </p:cNvPr>
+          <p:cNvSpPr>
+            <a:spLocks xmlns:a="http://schemas.openxmlformats.org/drawingml/2006/main" noGrp="1"/>
+          </p:cNvSpPr>
+          <p:nvPr/>
+        </p:nvSpPr>
+        <p:spPr>
+          <a:xfrm xmlns:a="http://schemas.openxmlformats.org/drawingml/2006/main">
+            <a:off x="1714500" y="3819525"/>
+            <a:ext cx="9334500" cy="9525"/>
+          </a:xfrm>
+          <a:prstGeom xmlns:a="http://schemas.openxmlformats.org/drawingml/2006/main" prst="rect">
             <a:avLst/>
           </a:prstGeom>
           <a:solidFill xmlns:a="http://schemas.openxmlformats.org/drawingml/2006/main">
-            <a:srgbClr val="2C6E73"/>
+            <a:srgbClr val="D9E0E6"/>
           </a:solidFill>
           <a:ln xmlns:a="http://schemas.openxmlformats.org/drawingml/2006/main" w="0">
-            <a:noFill/>
+            <a:solidFill>
+              <a:srgbClr val="D9E0E6"/>
+            </a:solidFill>
           </a:ln>
         </p:spPr>
       </p:sp>
@@ -8585,19 +8591,19 @@
           <p:cNvPr id="18" name="">
             <a:extLst xmlns:a="http://schemas.openxmlformats.org/drawingml/2006/main">
               <a:ext uri="{FF2B5EF4-FFF2-40B4-BE49-F238E27FC236}">
-                <a16:creationId xmlns:a16="http://schemas.microsoft.com/office/drawing/2014/main" id="{B09BF996-D16E-4B27-99CA-AF5299C69D48}"/>
-              </a:ext>
-            </a:extLst>
-          </p:cNvPr>
-          <p:cNvSpPr>
-            <a:spLocks xmlns:a="http://schemas.openxmlformats.org/drawingml/2006/main" noGrp="1"/>
-          </p:cNvSpPr>
-          <p:nvPr/>
-        </p:nvSpPr>
-        <p:spPr>
-          <a:xfrm xmlns:a="http://schemas.openxmlformats.org/drawingml/2006/main">
-            <a:off x="1000125" y="3762375"/>
-            <a:ext cx="476250" cy="419100"/>
+                <a16:creationId xmlns:a16="http://schemas.microsoft.com/office/drawing/2014/main" id="{F22EEFF9-5235-4127-BD6E-B92C5D9BBA95}"/>
+              </a:ext>
+            </a:extLst>
+          </p:cNvPr>
+          <p:cNvSpPr>
+            <a:spLocks xmlns:a="http://schemas.openxmlformats.org/drawingml/2006/main" noGrp="1"/>
+          </p:cNvSpPr>
+          <p:nvPr/>
+        </p:nvSpPr>
+        <p:spPr>
+          <a:xfrm xmlns:a="http://schemas.openxmlformats.org/drawingml/2006/main">
+            <a:off x="1162050" y="3952875"/>
+            <a:ext cx="400050" cy="400050"/>
           </a:xfrm>
           <a:prstGeom xmlns:a="http://schemas.openxmlformats.org/drawingml/2006/main" prst="rect">
             <a:avLst/>
@@ -8614,9 +8620,9 @@
           <a:lstStyle xmlns:a="http://schemas.openxmlformats.org/drawingml/2006/main"/>
           <a:p xmlns:a="http://schemas.openxmlformats.org/drawingml/2006/main">
             <a:pPr algn="ctr">
-              <a:defRPr sz="1350" b="1">
-                <a:solidFill>
-                  <a:srgbClr val="FFFFFF"/>
+              <a:defRPr sz="1125" b="1">
+                <a:solidFill>
+                  <a:srgbClr val="2C6E73"/>
                 </a:solidFill>
                 <a:latin typeface="Arial"/>
                 <a:ea typeface="Arial"/>
@@ -8624,9 +8630,9 @@
               </a:defRPr>
             </a:pPr>
             <a:r>
-              <a:rPr sz="1350" b="1">
-                <a:solidFill>
-                  <a:srgbClr val="FFFFFF"/>
+              <a:rPr sz="1125" b="1">
+                <a:solidFill>
+                  <a:srgbClr val="2C6E73"/>
                 </a:solidFill>
                 <a:latin typeface="Arial"/>
                 <a:ea typeface="Arial"/>
@@ -8642,19 +8648,19 @@
           <p:cNvPr id="19" name="">
             <a:extLst xmlns:a="http://schemas.openxmlformats.org/drawingml/2006/main">
               <a:ext uri="{FF2B5EF4-FFF2-40B4-BE49-F238E27FC236}">
-                <a16:creationId xmlns:a16="http://schemas.microsoft.com/office/drawing/2014/main" id="{CD3D2858-AB40-4394-8B38-BD39CCC4B20E}"/>
-              </a:ext>
-            </a:extLst>
-          </p:cNvPr>
-          <p:cNvSpPr>
-            <a:spLocks xmlns:a="http://schemas.openxmlformats.org/drawingml/2006/main" noGrp="1"/>
-          </p:cNvSpPr>
-          <p:nvPr/>
-        </p:nvSpPr>
-        <p:spPr>
-          <a:xfrm xmlns:a="http://schemas.openxmlformats.org/drawingml/2006/main">
-            <a:off x="1714500" y="3667125"/>
-            <a:ext cx="9429750" cy="609600"/>
+                <a16:creationId xmlns:a16="http://schemas.microsoft.com/office/drawing/2014/main" id="{307FC345-722E-4D66-9C08-70D5A22E95F0}"/>
+              </a:ext>
+            </a:extLst>
+          </p:cNvPr>
+          <p:cNvSpPr>
+            <a:spLocks xmlns:a="http://schemas.openxmlformats.org/drawingml/2006/main" noGrp="1"/>
+          </p:cNvSpPr>
+          <p:nvPr/>
+        </p:nvSpPr>
+        <p:spPr>
+          <a:xfrm xmlns:a="http://schemas.openxmlformats.org/drawingml/2006/main">
+            <a:off x="1714500" y="3867150"/>
+            <a:ext cx="9525000" cy="809625"/>
           </a:xfrm>
           <a:prstGeom xmlns:a="http://schemas.openxmlformats.org/drawingml/2006/main" prst="rect">
             <a:avLst/>
@@ -8671,7 +8677,7 @@
           <a:lstStyle xmlns:a="http://schemas.openxmlformats.org/drawingml/2006/main"/>
           <a:p xmlns:a="http://schemas.openxmlformats.org/drawingml/2006/main">
             <a:pPr algn="l">
-              <a:defRPr sz="1500" b="0">
+              <a:defRPr sz="1725" b="0">
                 <a:solidFill>
                   <a:srgbClr val="17253A"/>
                 </a:solidFill>
@@ -8681,7 +8687,7 @@
               </a:defRPr>
             </a:pPr>
             <a:r>
-              <a:rPr sz="1500" b="0">
+              <a:rPr sz="1725" b="0">
                 <a:solidFill>
                   <a:srgbClr val="17253A"/>
                 </a:solidFill>
@@ -8689,7 +8695,7 @@
                 <a:ea typeface="Arial"/>
                 <a:cs typeface="Arial"/>
               </a:rPr>
-              <a:t>Complete the calculation: 9 cm.</a:t>
+              <a:t>2 × 4.5 cm</a:t>
             </a:r>
           </a:p>
         </p:txBody>
@@ -8699,28 +8705,30 @@
           <p:cNvPr id="20" name="">
             <a:extLst xmlns:a="http://schemas.openxmlformats.org/drawingml/2006/main">
               <a:ext uri="{FF2B5EF4-FFF2-40B4-BE49-F238E27FC236}">
-                <a16:creationId xmlns:a16="http://schemas.microsoft.com/office/drawing/2014/main" id="{47C9C06A-5884-44E9-9CF8-6B65C09560E7}"/>
-              </a:ext>
-            </a:extLst>
-          </p:cNvPr>
-          <p:cNvSpPr>
-            <a:spLocks xmlns:a="http://schemas.openxmlformats.org/drawingml/2006/main" noGrp="1"/>
-          </p:cNvSpPr>
-          <p:nvPr/>
-        </p:nvSpPr>
-        <p:spPr>
-          <a:xfrm xmlns:a="http://schemas.openxmlformats.org/drawingml/2006/main">
-            <a:off x="1000125" y="4476750"/>
-            <a:ext cx="476250" cy="476250"/>
-          </a:xfrm>
-          <a:prstGeom xmlns:a="http://schemas.openxmlformats.org/drawingml/2006/main" prst="ellipse">
+                <a16:creationId xmlns:a16="http://schemas.microsoft.com/office/drawing/2014/main" id="{3955C69D-F66D-41B6-9A19-DE2420FA4628}"/>
+              </a:ext>
+            </a:extLst>
+          </p:cNvPr>
+          <p:cNvSpPr>
+            <a:spLocks xmlns:a="http://schemas.openxmlformats.org/drawingml/2006/main" noGrp="1"/>
+          </p:cNvSpPr>
+          <p:nvPr/>
+        </p:nvSpPr>
+        <p:spPr>
+          <a:xfrm xmlns:a="http://schemas.openxmlformats.org/drawingml/2006/main">
+            <a:off x="1714500" y="4695825"/>
+            <a:ext cx="9334500" cy="9525"/>
+          </a:xfrm>
+          <a:prstGeom xmlns:a="http://schemas.openxmlformats.org/drawingml/2006/main" prst="rect">
             <a:avLst/>
           </a:prstGeom>
           <a:solidFill xmlns:a="http://schemas.openxmlformats.org/drawingml/2006/main">
-            <a:srgbClr val="2C6E73"/>
+            <a:srgbClr val="D9E0E6"/>
           </a:solidFill>
           <a:ln xmlns:a="http://schemas.openxmlformats.org/drawingml/2006/main" w="0">
-            <a:noFill/>
+            <a:solidFill>
+              <a:srgbClr val="D9E0E6"/>
+            </a:solidFill>
           </a:ln>
         </p:spPr>
       </p:sp>
@@ -8729,19 +8737,19 @@
           <p:cNvPr id="21" name="">
             <a:extLst xmlns:a="http://schemas.openxmlformats.org/drawingml/2006/main">
               <a:ext uri="{FF2B5EF4-FFF2-40B4-BE49-F238E27FC236}">
-                <a16:creationId xmlns:a16="http://schemas.microsoft.com/office/drawing/2014/main" id="{5571919D-8B75-4414-9C96-A0045B1A22BC}"/>
-              </a:ext>
-            </a:extLst>
-          </p:cNvPr>
-          <p:cNvSpPr>
-            <a:spLocks xmlns:a="http://schemas.openxmlformats.org/drawingml/2006/main" noGrp="1"/>
-          </p:cNvSpPr>
-          <p:nvPr/>
-        </p:nvSpPr>
-        <p:spPr>
-          <a:xfrm xmlns:a="http://schemas.openxmlformats.org/drawingml/2006/main">
-            <a:off x="1000125" y="4505325"/>
-            <a:ext cx="476250" cy="419100"/>
+                <a16:creationId xmlns:a16="http://schemas.microsoft.com/office/drawing/2014/main" id="{922AEFBA-0DE9-41B4-A112-1BFB3FCDA470}"/>
+              </a:ext>
+            </a:extLst>
+          </p:cNvPr>
+          <p:cNvSpPr>
+            <a:spLocks xmlns:a="http://schemas.openxmlformats.org/drawingml/2006/main" noGrp="1"/>
+          </p:cNvSpPr>
+          <p:nvPr/>
+        </p:nvSpPr>
+        <p:spPr>
+          <a:xfrm xmlns:a="http://schemas.openxmlformats.org/drawingml/2006/main">
+            <a:off x="1162050" y="4829175"/>
+            <a:ext cx="400050" cy="400050"/>
           </a:xfrm>
           <a:prstGeom xmlns:a="http://schemas.openxmlformats.org/drawingml/2006/main" prst="rect">
             <a:avLst/>
@@ -8758,9 +8766,9 @@
           <a:lstStyle xmlns:a="http://schemas.openxmlformats.org/drawingml/2006/main"/>
           <a:p xmlns:a="http://schemas.openxmlformats.org/drawingml/2006/main">
             <a:pPr algn="ctr">
-              <a:defRPr sz="1350" b="1">
-                <a:solidFill>
-                  <a:srgbClr val="FFFFFF"/>
+              <a:defRPr sz="1125" b="1">
+                <a:solidFill>
+                  <a:srgbClr val="2F785D"/>
                 </a:solidFill>
                 <a:latin typeface="Arial"/>
                 <a:ea typeface="Arial"/>
@@ -8768,9 +8776,9 @@
               </a:defRPr>
             </a:pPr>
             <a:r>
-              <a:rPr sz="1350" b="1">
-                <a:solidFill>
-                  <a:srgbClr val="FFFFFF"/>
+              <a:rPr sz="1125" b="1">
+                <a:solidFill>
+                  <a:srgbClr val="2F785D"/>
                 </a:solidFill>
                 <a:latin typeface="Arial"/>
                 <a:ea typeface="Arial"/>
@@ -8786,19 +8794,19 @@
           <p:cNvPr id="22" name="">
             <a:extLst xmlns:a="http://schemas.openxmlformats.org/drawingml/2006/main">
               <a:ext uri="{FF2B5EF4-FFF2-40B4-BE49-F238E27FC236}">
-                <a16:creationId xmlns:a16="http://schemas.microsoft.com/office/drawing/2014/main" id="{4E8BE9A1-4A8E-4105-BD3E-AA9E003289FE}"/>
-              </a:ext>
-            </a:extLst>
-          </p:cNvPr>
-          <p:cNvSpPr>
-            <a:spLocks xmlns:a="http://schemas.openxmlformats.org/drawingml/2006/main" noGrp="1"/>
-          </p:cNvSpPr>
-          <p:nvPr/>
-        </p:nvSpPr>
-        <p:spPr>
-          <a:xfrm xmlns:a="http://schemas.openxmlformats.org/drawingml/2006/main">
-            <a:off x="1714500" y="4410075"/>
-            <a:ext cx="9429750" cy="609600"/>
+                <a16:creationId xmlns:a16="http://schemas.microsoft.com/office/drawing/2014/main" id="{F3FA4E1F-C6BD-4AEA-924E-3BE0CFACF4A0}"/>
+              </a:ext>
+            </a:extLst>
+          </p:cNvPr>
+          <p:cNvSpPr>
+            <a:spLocks xmlns:a="http://schemas.openxmlformats.org/drawingml/2006/main" noGrp="1"/>
+          </p:cNvSpPr>
+          <p:nvPr/>
+        </p:nvSpPr>
+        <p:spPr>
+          <a:xfrm xmlns:a="http://schemas.openxmlformats.org/drawingml/2006/main">
+            <a:off x="1714500" y="4743450"/>
+            <a:ext cx="9525000" cy="809625"/>
           </a:xfrm>
           <a:prstGeom xmlns:a="http://schemas.openxmlformats.org/drawingml/2006/main" prst="rect">
             <a:avLst/>
@@ -8815,7 +8823,7 @@
           <a:lstStyle xmlns:a="http://schemas.openxmlformats.org/drawingml/2006/main"/>
           <a:p xmlns:a="http://schemas.openxmlformats.org/drawingml/2006/main">
             <a:pPr algn="l">
-              <a:defRPr sz="1500" b="1">
+              <a:defRPr sz="1725" b="1">
                 <a:solidFill>
                   <a:srgbClr val="2F785D"/>
                 </a:solidFill>
@@ -8825,7 +8833,7 @@
               </a:defRPr>
             </a:pPr>
             <a:r>
-              <a:rPr sz="1500" b="1">
+              <a:rPr sz="1725" b="1">
                 <a:solidFill>
                   <a:srgbClr val="2F785D"/>
                 </a:solidFill>
@@ -8833,7 +8841,7 @@
                 <a:ea typeface="Arial"/>
                 <a:cs typeface="Arial"/>
               </a:rPr>
-              <a:t>Check the result: Check the angle size and label it with degrees.</a:t>
+              <a:t>Diameter = 9 cm</a:t>
             </a:r>
           </a:p>
         </p:txBody>
@@ -8841,7 +8849,7 @@
     </p:spTree>
     <p:extLst>
       <p:ext uri="{BB962C8B-B14F-4D97-AF65-F5344CB8AC3E}">
-        <p14:creationId xmlns:p14="http://schemas.microsoft.com/office/powerpoint/2010/main" val="1800523893"/>
+        <p14:creationId xmlns:p14="http://schemas.microsoft.com/office/powerpoint/2010/main" val="1579176304"/>
       </p:ext>
     </p:extLst>
   </p:cSld>
@@ -9134,7 +9142,7 @@
           <p:cNvPr id="15" name="">
             <a:extLst xmlns:a="http://schemas.openxmlformats.org/drawingml/2006/main">
               <a:ext uri="{FF2B5EF4-FFF2-40B4-BE49-F238E27FC236}">
-                <a16:creationId xmlns:a16="http://schemas.microsoft.com/office/drawing/2014/main" id="{1330AAE2-9853-4D3C-8547-CAEC4309A568}"/>
+                <a16:creationId xmlns:a16="http://schemas.microsoft.com/office/drawing/2014/main" id="{A6F39848-A345-4788-B0F4-25E49C2ECA03}"/>
               </a:ext>
             </a:extLst>
           </p:cNvPr>
@@ -9166,7 +9174,7 @@
           <p:cNvPr id="2" name="">
             <a:extLst xmlns:a="http://schemas.openxmlformats.org/drawingml/2006/main">
               <a:ext uri="{FF2B5EF4-FFF2-40B4-BE49-F238E27FC236}">
-                <a16:creationId xmlns:a16="http://schemas.microsoft.com/office/drawing/2014/main" id="{E5344758-A3C6-4A66-A4B2-35726EEA842C}"/>
+                <a16:creationId xmlns:a16="http://schemas.microsoft.com/office/drawing/2014/main" id="{1E83F62E-B33E-40DD-8078-F246495699F4}"/>
               </a:ext>
             </a:extLst>
           </p:cNvPr>
@@ -9223,7 +9231,7 @@
           <p:cNvPr id="3" name="">
             <a:extLst xmlns:a="http://schemas.openxmlformats.org/drawingml/2006/main">
               <a:ext uri="{FF2B5EF4-FFF2-40B4-BE49-F238E27FC236}">
-                <a16:creationId xmlns:a16="http://schemas.microsoft.com/office/drawing/2014/main" id="{40919CDA-1A32-4329-BB89-A72891BEBFE2}"/>
+                <a16:creationId xmlns:a16="http://schemas.microsoft.com/office/drawing/2014/main" id="{9D6E7978-4486-4490-A89D-B42E87C71960}"/>
               </a:ext>
             </a:extLst>
           </p:cNvPr>
@@ -9255,7 +9263,7 @@
           <p:cNvPr id="4" name="">
             <a:extLst xmlns:a="http://schemas.openxmlformats.org/drawingml/2006/main">
               <a:ext uri="{FF2B5EF4-FFF2-40B4-BE49-F238E27FC236}">
-                <a16:creationId xmlns:a16="http://schemas.microsoft.com/office/drawing/2014/main" id="{D4A8B869-3542-48A8-9D3D-24F5F4278E79}"/>
+                <a16:creationId xmlns:a16="http://schemas.microsoft.com/office/drawing/2014/main" id="{CAA84014-2EDA-4A90-AE7D-773087FC18EF}"/>
               </a:ext>
             </a:extLst>
           </p:cNvPr>
@@ -9312,7 +9320,7 @@
           <p:cNvPr id="5" name="">
             <a:extLst xmlns:a="http://schemas.openxmlformats.org/drawingml/2006/main">
               <a:ext uri="{FF2B5EF4-FFF2-40B4-BE49-F238E27FC236}">
-                <a16:creationId xmlns:a16="http://schemas.microsoft.com/office/drawing/2014/main" id="{50113BB0-2ADE-4E9F-968E-1A22C536AC36}"/>
+                <a16:creationId xmlns:a16="http://schemas.microsoft.com/office/drawing/2014/main" id="{A7634AC3-20AA-400E-A101-0A652ADD65A6}"/>
               </a:ext>
             </a:extLst>
           </p:cNvPr>
@@ -9369,7 +9377,7 @@
           <p:cNvPr id="6" name="">
             <a:extLst xmlns:a="http://schemas.openxmlformats.org/drawingml/2006/main">
               <a:ext uri="{FF2B5EF4-FFF2-40B4-BE49-F238E27FC236}">
-                <a16:creationId xmlns:a16="http://schemas.microsoft.com/office/drawing/2014/main" id="{A031D76A-CEF1-4694-AE4F-C9D30B08B017}"/>
+                <a16:creationId xmlns:a16="http://schemas.microsoft.com/office/drawing/2014/main" id="{D54593C2-32C6-4AF6-A14F-AA99C7C0F525}"/>
               </a:ext>
             </a:extLst>
           </p:cNvPr>
@@ -9426,7 +9434,7 @@
           <p:cNvPr id="7" name="">
             <a:extLst xmlns:a="http://schemas.openxmlformats.org/drawingml/2006/main">
               <a:ext uri="{FF2B5EF4-FFF2-40B4-BE49-F238E27FC236}">
-                <a16:creationId xmlns:a16="http://schemas.microsoft.com/office/drawing/2014/main" id="{A7DD264B-73CD-431D-807F-61E4B2CDB7FD}"/>
+                <a16:creationId xmlns:a16="http://schemas.microsoft.com/office/drawing/2014/main" id="{93A711FA-3CDC-4E20-A7AD-66BC72123810}"/>
               </a:ext>
             </a:extLst>
           </p:cNvPr>
@@ -9458,7 +9466,7 @@
           <p:cNvPr id="8" name="">
             <a:extLst xmlns:a="http://schemas.openxmlformats.org/drawingml/2006/main">
               <a:ext uri="{FF2B5EF4-FFF2-40B4-BE49-F238E27FC236}">
-                <a16:creationId xmlns:a16="http://schemas.microsoft.com/office/drawing/2014/main" id="{44C7789F-6CDD-4544-809D-40BD8C2BAE55}"/>
+                <a16:creationId xmlns:a16="http://schemas.microsoft.com/office/drawing/2014/main" id="{8B3014C1-CA3D-4C3F-AE81-060A4F495515}"/>
               </a:ext>
             </a:extLst>
           </p:cNvPr>
@@ -9515,7 +9523,7 @@
           <p:cNvPr id="9" name="">
             <a:extLst xmlns:a="http://schemas.openxmlformats.org/drawingml/2006/main">
               <a:ext uri="{FF2B5EF4-FFF2-40B4-BE49-F238E27FC236}">
-                <a16:creationId xmlns:a16="http://schemas.microsoft.com/office/drawing/2014/main" id="{F5C1286C-5EED-4151-8F70-AD1FFA2A6B14}"/>
+                <a16:creationId xmlns:a16="http://schemas.microsoft.com/office/drawing/2014/main" id="{597D126F-E8F1-41E3-9A0A-0B955D1526A7}"/>
               </a:ext>
             </a:extLst>
           </p:cNvPr>
@@ -9572,7 +9580,7 @@
           <p:cNvPr id="10" name="">
             <a:extLst xmlns:a="http://schemas.openxmlformats.org/drawingml/2006/main">
               <a:ext uri="{FF2B5EF4-FFF2-40B4-BE49-F238E27FC236}">
-                <a16:creationId xmlns:a16="http://schemas.microsoft.com/office/drawing/2014/main" id="{1C00E7F7-65CA-4C7C-A203-6776B834E88A}"/>
+                <a16:creationId xmlns:a16="http://schemas.microsoft.com/office/drawing/2014/main" id="{4F9E225F-2575-4A18-A165-19B83D9B944E}"/>
               </a:ext>
             </a:extLst>
           </p:cNvPr>
@@ -9629,7 +9637,7 @@
           <p:cNvPr id="11" name="">
             <a:extLst xmlns:a="http://schemas.openxmlformats.org/drawingml/2006/main">
               <a:ext uri="{FF2B5EF4-FFF2-40B4-BE49-F238E27FC236}">
-                <a16:creationId xmlns:a16="http://schemas.microsoft.com/office/drawing/2014/main" id="{72BCD036-CECC-4C5E-A445-D2E721C343B8}"/>
+                <a16:creationId xmlns:a16="http://schemas.microsoft.com/office/drawing/2014/main" id="{78E0CC64-0396-4868-9387-0A9654E0E325}"/>
               </a:ext>
             </a:extLst>
           </p:cNvPr>
@@ -9686,7 +9694,7 @@
           <p:cNvPr id="12" name="">
             <a:extLst xmlns:a="http://schemas.openxmlformats.org/drawingml/2006/main">
               <a:ext uri="{FF2B5EF4-FFF2-40B4-BE49-F238E27FC236}">
-                <a16:creationId xmlns:a16="http://schemas.microsoft.com/office/drawing/2014/main" id="{40D5B231-07EF-4CA1-9692-42CD955DF692}"/>
+                <a16:creationId xmlns:a16="http://schemas.microsoft.com/office/drawing/2014/main" id="{0A239315-B5A0-448D-A57D-D55FBEC7062D}"/>
               </a:ext>
             </a:extLst>
           </p:cNvPr>
@@ -9718,7 +9726,7 @@
           <p:cNvPr id="13" name="">
             <a:extLst xmlns:a="http://schemas.openxmlformats.org/drawingml/2006/main">
               <a:ext uri="{FF2B5EF4-FFF2-40B4-BE49-F238E27FC236}">
-                <a16:creationId xmlns:a16="http://schemas.microsoft.com/office/drawing/2014/main" id="{EAD4B0EF-CC18-43A6-B8F0-F9D47803720A}"/>
+                <a16:creationId xmlns:a16="http://schemas.microsoft.com/office/drawing/2014/main" id="{CF280C25-D7E3-4EBA-ACF8-E580C8F5165A}"/>
               </a:ext>
             </a:extLst>
           </p:cNvPr>
@@ -9775,7 +9783,7 @@
           <p:cNvPr id="14" name="">
             <a:extLst xmlns:a="http://schemas.openxmlformats.org/drawingml/2006/main">
               <a:ext uri="{FF2B5EF4-FFF2-40B4-BE49-F238E27FC236}">
-                <a16:creationId xmlns:a16="http://schemas.microsoft.com/office/drawing/2014/main" id="{DF2F544D-A652-4354-A40C-7E87C27B93D6}"/>
+                <a16:creationId xmlns:a16="http://schemas.microsoft.com/office/drawing/2014/main" id="{17EDBA6C-4679-42C2-A138-7B053DA5B0B1}"/>
               </a:ext>
             </a:extLst>
           </p:cNvPr>
@@ -9830,7 +9838,7 @@
     </p:spTree>
     <p:extLst>
       <p:ext uri="{BB962C8B-B14F-4D97-AF65-F5344CB8AC3E}">
-        <p14:creationId xmlns:p14="http://schemas.microsoft.com/office/powerpoint/2010/main" val="190314321"/>
+        <p14:creationId xmlns:p14="http://schemas.microsoft.com/office/powerpoint/2010/main" val="1373366978"/>
       </p:ext>
     </p:extLst>
   </p:cSld>
@@ -10031,7 +10039,7 @@
           <p:cNvPr id="16" name="">
             <a:extLst xmlns:a="http://schemas.openxmlformats.org/drawingml/2006/main">
               <a:ext uri="{FF2B5EF4-FFF2-40B4-BE49-F238E27FC236}">
-                <a16:creationId xmlns:a16="http://schemas.microsoft.com/office/drawing/2014/main" id="{F8B14E04-0BD4-40B5-A44D-DD757AD9BB07}"/>
+                <a16:creationId xmlns:a16="http://schemas.microsoft.com/office/drawing/2014/main" id="{C8BF69FA-9B7C-4F7B-99D5-393E2EFE90DD}"/>
               </a:ext>
             </a:extLst>
           </p:cNvPr>
@@ -10063,7 +10071,7 @@
           <p:cNvPr id="2" name="">
             <a:extLst xmlns:a="http://schemas.openxmlformats.org/drawingml/2006/main">
               <a:ext uri="{FF2B5EF4-FFF2-40B4-BE49-F238E27FC236}">
-                <a16:creationId xmlns:a16="http://schemas.microsoft.com/office/drawing/2014/main" id="{7D95CDE5-DDBA-427F-81C2-4020C9960F3A}"/>
+                <a16:creationId xmlns:a16="http://schemas.microsoft.com/office/drawing/2014/main" id="{13D39765-EC87-4F52-B256-01A060104131}"/>
               </a:ext>
             </a:extLst>
           </p:cNvPr>
@@ -10120,7 +10128,7 @@
           <p:cNvPr id="3" name="">
             <a:extLst xmlns:a="http://schemas.openxmlformats.org/drawingml/2006/main">
               <a:ext uri="{FF2B5EF4-FFF2-40B4-BE49-F238E27FC236}">
-                <a16:creationId xmlns:a16="http://schemas.microsoft.com/office/drawing/2014/main" id="{80712ABD-9798-4E31-A1FA-9253D1514913}"/>
+                <a16:creationId xmlns:a16="http://schemas.microsoft.com/office/drawing/2014/main" id="{3667EAE2-CFB6-48CB-94D4-FB220056D2FE}"/>
               </a:ext>
             </a:extLst>
           </p:cNvPr>
@@ -10152,7 +10160,7 @@
           <p:cNvPr id="4" name="">
             <a:extLst xmlns:a="http://schemas.openxmlformats.org/drawingml/2006/main">
               <a:ext uri="{FF2B5EF4-FFF2-40B4-BE49-F238E27FC236}">
-                <a16:creationId xmlns:a16="http://schemas.microsoft.com/office/drawing/2014/main" id="{6076DB4A-6C50-4846-8E72-07687FC199F9}"/>
+                <a16:creationId xmlns:a16="http://schemas.microsoft.com/office/drawing/2014/main" id="{3028144A-EEC0-4825-8BDC-D289CE358731}"/>
               </a:ext>
             </a:extLst>
           </p:cNvPr>
@@ -10209,7 +10217,7 @@
           <p:cNvPr id="5" name="">
             <a:extLst xmlns:a="http://schemas.openxmlformats.org/drawingml/2006/main">
               <a:ext uri="{FF2B5EF4-FFF2-40B4-BE49-F238E27FC236}">
-                <a16:creationId xmlns:a16="http://schemas.microsoft.com/office/drawing/2014/main" id="{3C7546B2-BD28-44B7-A761-493ED16C278E}"/>
+                <a16:creationId xmlns:a16="http://schemas.microsoft.com/office/drawing/2014/main" id="{F45E96BE-D0A5-460A-8BDE-2ECBB1963BF1}"/>
               </a:ext>
             </a:extLst>
           </p:cNvPr>
@@ -10266,7 +10274,7 @@
           <p:cNvPr id="6" name="">
             <a:extLst xmlns:a="http://schemas.openxmlformats.org/drawingml/2006/main">
               <a:ext uri="{FF2B5EF4-FFF2-40B4-BE49-F238E27FC236}">
-                <a16:creationId xmlns:a16="http://schemas.microsoft.com/office/drawing/2014/main" id="{91ABBF9E-8CC4-4824-BCFC-ED98880F7078}"/>
+                <a16:creationId xmlns:a16="http://schemas.microsoft.com/office/drawing/2014/main" id="{FDD6689B-B220-4AC1-8B13-33BEED1E82D7}"/>
               </a:ext>
             </a:extLst>
           </p:cNvPr>
@@ -10323,7 +10331,7 @@
           <p:cNvPr id="7" name="">
             <a:extLst xmlns:a="http://schemas.openxmlformats.org/drawingml/2006/main">
               <a:ext uri="{FF2B5EF4-FFF2-40B4-BE49-F238E27FC236}">
-                <a16:creationId xmlns:a16="http://schemas.microsoft.com/office/drawing/2014/main" id="{0F82A9AF-4146-426F-BEAB-F0AFBA54FBA9}"/>
+                <a16:creationId xmlns:a16="http://schemas.microsoft.com/office/drawing/2014/main" id="{5D56A75A-3D0C-4322-BD9B-067D9F991456}"/>
               </a:ext>
             </a:extLst>
           </p:cNvPr>
@@ -10355,7 +10363,7 @@
           <p:cNvPr id="8" name="">
             <a:extLst xmlns:a="http://schemas.openxmlformats.org/drawingml/2006/main">
               <a:ext uri="{FF2B5EF4-FFF2-40B4-BE49-F238E27FC236}">
-                <a16:creationId xmlns:a16="http://schemas.microsoft.com/office/drawing/2014/main" id="{98E15DAB-AD7E-41D2-BF40-3BEC61551A25}"/>
+                <a16:creationId xmlns:a16="http://schemas.microsoft.com/office/drawing/2014/main" id="{D3DF6C42-CC68-4B55-9D9C-92E54D8DBFE8}"/>
               </a:ext>
             </a:extLst>
           </p:cNvPr>
@@ -10412,7 +10420,7 @@
           <p:cNvPr id="9" name="">
             <a:extLst xmlns:a="http://schemas.openxmlformats.org/drawingml/2006/main">
               <a:ext uri="{FF2B5EF4-FFF2-40B4-BE49-F238E27FC236}">
-                <a16:creationId xmlns:a16="http://schemas.microsoft.com/office/drawing/2014/main" id="{91A62AD4-E87A-43AF-87E2-846FCF0F2A11}"/>
+                <a16:creationId xmlns:a16="http://schemas.microsoft.com/office/drawing/2014/main" id="{3ADC2277-7100-4FDB-AE44-75EE29B9A59F}"/>
               </a:ext>
             </a:extLst>
           </p:cNvPr>
@@ -10469,7 +10477,7 @@
           <p:cNvPr id="10" name="">
             <a:extLst xmlns:a="http://schemas.openxmlformats.org/drawingml/2006/main">
               <a:ext uri="{FF2B5EF4-FFF2-40B4-BE49-F238E27FC236}">
-                <a16:creationId xmlns:a16="http://schemas.microsoft.com/office/drawing/2014/main" id="{7EDDBA8F-D3BF-4BF4-A921-5980C693A66A}"/>
+                <a16:creationId xmlns:a16="http://schemas.microsoft.com/office/drawing/2014/main" id="{9D07AB77-F02A-4A3C-91D5-21A97E8FFA22}"/>
               </a:ext>
             </a:extLst>
           </p:cNvPr>
@@ -10526,7 +10534,7 @@
           <p:cNvPr id="11" name="">
             <a:extLst xmlns:a="http://schemas.openxmlformats.org/drawingml/2006/main">
               <a:ext uri="{FF2B5EF4-FFF2-40B4-BE49-F238E27FC236}">
-                <a16:creationId xmlns:a16="http://schemas.microsoft.com/office/drawing/2014/main" id="{458C31A9-D389-4BF1-8606-F651CC63F2CD}"/>
+                <a16:creationId xmlns:a16="http://schemas.microsoft.com/office/drawing/2014/main" id="{7CCCD692-CCE3-46F9-B2A7-3A2092AA1109}"/>
               </a:ext>
             </a:extLst>
           </p:cNvPr>
@@ -10583,7 +10591,7 @@
           <p:cNvPr id="12" name="">
             <a:extLst xmlns:a="http://schemas.openxmlformats.org/drawingml/2006/main">
               <a:ext uri="{FF2B5EF4-FFF2-40B4-BE49-F238E27FC236}">
-                <a16:creationId xmlns:a16="http://schemas.microsoft.com/office/drawing/2014/main" id="{54672557-5E0A-4B56-9BF9-756764F96F25}"/>
+                <a16:creationId xmlns:a16="http://schemas.microsoft.com/office/drawing/2014/main" id="{9F1E0E86-FD1E-4785-B0F0-0F0F8DAC77C9}"/>
               </a:ext>
             </a:extLst>
           </p:cNvPr>
@@ -10640,7 +10648,7 @@
           <p:cNvPr id="13" name="">
             <a:extLst xmlns:a="http://schemas.openxmlformats.org/drawingml/2006/main">
               <a:ext uri="{FF2B5EF4-FFF2-40B4-BE49-F238E27FC236}">
-                <a16:creationId xmlns:a16="http://schemas.microsoft.com/office/drawing/2014/main" id="{39643B6E-5F26-42D4-842D-FF91C9FE83BC}"/>
+                <a16:creationId xmlns:a16="http://schemas.microsoft.com/office/drawing/2014/main" id="{C4CF8127-239A-4EA9-9772-A555E679AB7E}"/>
               </a:ext>
             </a:extLst>
           </p:cNvPr>
@@ -10697,7 +10705,7 @@
           <p:cNvPr id="14" name="">
             <a:extLst xmlns:a="http://schemas.openxmlformats.org/drawingml/2006/main">
               <a:ext uri="{FF2B5EF4-FFF2-40B4-BE49-F238E27FC236}">
-                <a16:creationId xmlns:a16="http://schemas.microsoft.com/office/drawing/2014/main" id="{8FCB0B04-12EB-4608-A4FD-46D95681A46C}"/>
+                <a16:creationId xmlns:a16="http://schemas.microsoft.com/office/drawing/2014/main" id="{3DDAB2F0-0AA2-4ED0-95CA-D63A18DBF41D}"/>
               </a:ext>
             </a:extLst>
           </p:cNvPr>
@@ -10754,7 +10762,7 @@
           <p:cNvPr id="15" name="">
             <a:extLst xmlns:a="http://schemas.openxmlformats.org/drawingml/2006/main">
               <a:ext uri="{FF2B5EF4-FFF2-40B4-BE49-F238E27FC236}">
-                <a16:creationId xmlns:a16="http://schemas.microsoft.com/office/drawing/2014/main" id="{AEAD0B83-044D-4490-AD84-720FD9AB99C6}"/>
+                <a16:creationId xmlns:a16="http://schemas.microsoft.com/office/drawing/2014/main" id="{D975A726-62E0-4E4C-B47A-27F3BD4977B9}"/>
               </a:ext>
             </a:extLst>
           </p:cNvPr>
@@ -10809,7 +10817,7 @@
     </p:spTree>
     <p:extLst>
       <p:ext uri="{BB962C8B-B14F-4D97-AF65-F5344CB8AC3E}">
-        <p14:creationId xmlns:p14="http://schemas.microsoft.com/office/powerpoint/2010/main" val="240311772"/>
+        <p14:creationId xmlns:p14="http://schemas.microsoft.com/office/powerpoint/2010/main" val="1030123108"/>
       </p:ext>
     </p:extLst>
   </p:cSld>
@@ -10964,7 +10972,7 @@
           <p:cNvPr id="16" name="">
             <a:extLst xmlns:a="http://schemas.openxmlformats.org/drawingml/2006/main">
               <a:ext uri="{FF2B5EF4-FFF2-40B4-BE49-F238E27FC236}">
-                <a16:creationId xmlns:a16="http://schemas.microsoft.com/office/drawing/2014/main" id="{37EC461A-553A-45D3-8909-8F41D845842C}"/>
+                <a16:creationId xmlns:a16="http://schemas.microsoft.com/office/drawing/2014/main" id="{E99AACB8-03BD-45FC-9073-0A9A5CAE0B47}"/>
               </a:ext>
             </a:extLst>
           </p:cNvPr>
@@ -10996,7 +11004,7 @@
           <p:cNvPr id="2" name="">
             <a:extLst xmlns:a="http://schemas.openxmlformats.org/drawingml/2006/main">
               <a:ext uri="{FF2B5EF4-FFF2-40B4-BE49-F238E27FC236}">
-                <a16:creationId xmlns:a16="http://schemas.microsoft.com/office/drawing/2014/main" id="{C4B9F9D6-5AA5-4E16-A7B8-FF41680C5731}"/>
+                <a16:creationId xmlns:a16="http://schemas.microsoft.com/office/drawing/2014/main" id="{8634388D-7400-4C79-9D20-31BEBFCE5DDE}"/>
               </a:ext>
             </a:extLst>
           </p:cNvPr>
@@ -11053,7 +11061,7 @@
           <p:cNvPr id="3" name="">
             <a:extLst xmlns:a="http://schemas.openxmlformats.org/drawingml/2006/main">
               <a:ext uri="{FF2B5EF4-FFF2-40B4-BE49-F238E27FC236}">
-                <a16:creationId xmlns:a16="http://schemas.microsoft.com/office/drawing/2014/main" id="{63D1111F-078B-474F-8EF5-7CF4FCD2893E}"/>
+                <a16:creationId xmlns:a16="http://schemas.microsoft.com/office/drawing/2014/main" id="{07520C19-4E62-499F-AAC8-9D21FBEB1200}"/>
               </a:ext>
             </a:extLst>
           </p:cNvPr>
@@ -11085,7 +11093,7 @@
           <p:cNvPr id="4" name="">
             <a:extLst xmlns:a="http://schemas.openxmlformats.org/drawingml/2006/main">
               <a:ext uri="{FF2B5EF4-FFF2-40B4-BE49-F238E27FC236}">
-                <a16:creationId xmlns:a16="http://schemas.microsoft.com/office/drawing/2014/main" id="{FB3D582B-90A9-4584-AD7B-2F35B6DDA6D6}"/>
+                <a16:creationId xmlns:a16="http://schemas.microsoft.com/office/drawing/2014/main" id="{AD348A76-B3CB-4DDC-922F-056710159E94}"/>
               </a:ext>
             </a:extLst>
           </p:cNvPr>
@@ -11142,7 +11150,7 @@
           <p:cNvPr id="5" name="">
             <a:extLst xmlns:a="http://schemas.openxmlformats.org/drawingml/2006/main">
               <a:ext uri="{FF2B5EF4-FFF2-40B4-BE49-F238E27FC236}">
-                <a16:creationId xmlns:a16="http://schemas.microsoft.com/office/drawing/2014/main" id="{498D9F17-DED2-44E3-BD9B-BAA58E683244}"/>
+                <a16:creationId xmlns:a16="http://schemas.microsoft.com/office/drawing/2014/main" id="{BBFB32A4-B63E-43D3-B8FE-245AC64947AC}"/>
               </a:ext>
             </a:extLst>
           </p:cNvPr>
@@ -11199,7 +11207,7 @@
           <p:cNvPr id="6" name="">
             <a:extLst xmlns:a="http://schemas.openxmlformats.org/drawingml/2006/main">
               <a:ext uri="{FF2B5EF4-FFF2-40B4-BE49-F238E27FC236}">
-                <a16:creationId xmlns:a16="http://schemas.microsoft.com/office/drawing/2014/main" id="{6A8088D9-2E40-4B0C-B396-F16101FB7507}"/>
+                <a16:creationId xmlns:a16="http://schemas.microsoft.com/office/drawing/2014/main" id="{B049AC2B-6484-4C33-8F95-446631C051E1}"/>
               </a:ext>
             </a:extLst>
           </p:cNvPr>
@@ -11256,7 +11264,7 @@
           <p:cNvPr id="7" name="">
             <a:extLst xmlns:a="http://schemas.openxmlformats.org/drawingml/2006/main">
               <a:ext uri="{FF2B5EF4-FFF2-40B4-BE49-F238E27FC236}">
-                <a16:creationId xmlns:a16="http://schemas.microsoft.com/office/drawing/2014/main" id="{FC162E5B-2084-421B-B913-2ED6FF7C2274}"/>
+                <a16:creationId xmlns:a16="http://schemas.microsoft.com/office/drawing/2014/main" id="{79B2CBAB-4BCA-4FCF-94D4-D5BB74C3C697}"/>
               </a:ext>
             </a:extLst>
           </p:cNvPr>
@@ -11288,7 +11296,7 @@
           <p:cNvPr id="8" name="">
             <a:extLst xmlns:a="http://schemas.openxmlformats.org/drawingml/2006/main">
               <a:ext uri="{FF2B5EF4-FFF2-40B4-BE49-F238E27FC236}">
-                <a16:creationId xmlns:a16="http://schemas.microsoft.com/office/drawing/2014/main" id="{1C1E4002-1FDC-4BD6-B49C-63040C6B48F1}"/>
+                <a16:creationId xmlns:a16="http://schemas.microsoft.com/office/drawing/2014/main" id="{68B4EA0A-6DD7-4719-B2C0-9436129B3BDE}"/>
               </a:ext>
             </a:extLst>
           </p:cNvPr>
@@ -11345,7 +11353,7 @@
           <p:cNvPr id="9" name="">
             <a:extLst xmlns:a="http://schemas.openxmlformats.org/drawingml/2006/main">
               <a:ext uri="{FF2B5EF4-FFF2-40B4-BE49-F238E27FC236}">
-                <a16:creationId xmlns:a16="http://schemas.microsoft.com/office/drawing/2014/main" id="{AA4B8A8C-C937-412F-A625-6071F17E0B6C}"/>
+                <a16:creationId xmlns:a16="http://schemas.microsoft.com/office/drawing/2014/main" id="{EB288C89-A416-4B14-B825-455B04183185}"/>
               </a:ext>
             </a:extLst>
           </p:cNvPr>
@@ -11406,7 +11414,7 @@
           <p:nvPr/>
         </p:nvPicPr>
         <p:blipFill>
-          <a:blip xmlns:r="http://schemas.openxmlformats.org/officeDocument/2006/relationships" xmlns:a="http://schemas.openxmlformats.org/drawingml/2006/main" r:embed="Rf1e78f36449b4a55"/>
+          <a:blip xmlns:r="http://schemas.openxmlformats.org/officeDocument/2006/relationships" xmlns:a="http://schemas.openxmlformats.org/drawingml/2006/main" r:embed="Rb6305f2b67b4489b"/>
           <a:stretch xmlns:a="http://schemas.openxmlformats.org/drawingml/2006/main"/>
         </p:blipFill>
         <p:spPr>
@@ -11424,7 +11432,7 @@
           <p:cNvPr id="11" name="">
             <a:extLst xmlns:a="http://schemas.openxmlformats.org/drawingml/2006/main">
               <a:ext uri="{FF2B5EF4-FFF2-40B4-BE49-F238E27FC236}">
-                <a16:creationId xmlns:a16="http://schemas.microsoft.com/office/drawing/2014/main" id="{4FB20BAF-18DF-48AA-B85C-335F22A59D1C}"/>
+                <a16:creationId xmlns:a16="http://schemas.microsoft.com/office/drawing/2014/main" id="{76B5A4F2-D2A4-492B-9247-03C9FD937770}"/>
               </a:ext>
             </a:extLst>
           </p:cNvPr>
@@ -11481,7 +11489,7 @@
           <p:cNvPr id="12" name="">
             <a:extLst xmlns:a="http://schemas.openxmlformats.org/drawingml/2006/main">
               <a:ext uri="{FF2B5EF4-FFF2-40B4-BE49-F238E27FC236}">
-                <a16:creationId xmlns:a16="http://schemas.microsoft.com/office/drawing/2014/main" id="{ECF9659B-5384-43AE-A12F-4B41EC305C80}"/>
+                <a16:creationId xmlns:a16="http://schemas.microsoft.com/office/drawing/2014/main" id="{877767E7-BB9C-42AE-AE6F-008EF85D92CA}"/>
               </a:ext>
             </a:extLst>
           </p:cNvPr>
@@ -11538,7 +11546,7 @@
           <p:cNvPr id="13" name="">
             <a:extLst xmlns:a="http://schemas.openxmlformats.org/drawingml/2006/main">
               <a:ext uri="{FF2B5EF4-FFF2-40B4-BE49-F238E27FC236}">
-                <a16:creationId xmlns:a16="http://schemas.microsoft.com/office/drawing/2014/main" id="{6F269A1A-0D4C-4025-AA9B-E93AE9E0C067}"/>
+                <a16:creationId xmlns:a16="http://schemas.microsoft.com/office/drawing/2014/main" id="{F8D4B084-4E18-49FB-9EA7-D29A356C61FE}"/>
               </a:ext>
             </a:extLst>
           </p:cNvPr>
@@ -11570,7 +11578,7 @@
           <p:cNvPr id="14" name="">
             <a:extLst xmlns:a="http://schemas.openxmlformats.org/drawingml/2006/main">
               <a:ext uri="{FF2B5EF4-FFF2-40B4-BE49-F238E27FC236}">
-                <a16:creationId xmlns:a16="http://schemas.microsoft.com/office/drawing/2014/main" id="{5BA77CD7-0653-46CF-9420-7F3948793C90}"/>
+                <a16:creationId xmlns:a16="http://schemas.microsoft.com/office/drawing/2014/main" id="{BE790F97-4FD5-4539-9FD2-49563A3219DD}"/>
               </a:ext>
             </a:extLst>
           </p:cNvPr>
@@ -11627,7 +11635,7 @@
           <p:cNvPr id="15" name="">
             <a:extLst xmlns:a="http://schemas.openxmlformats.org/drawingml/2006/main">
               <a:ext uri="{FF2B5EF4-FFF2-40B4-BE49-F238E27FC236}">
-                <a16:creationId xmlns:a16="http://schemas.microsoft.com/office/drawing/2014/main" id="{8AD4B4A6-DD44-4D09-96C4-F648B30193ED}"/>
+                <a16:creationId xmlns:a16="http://schemas.microsoft.com/office/drawing/2014/main" id="{3B80AE83-3D2C-4FC7-85BF-ECA4528CCEFC}"/>
               </a:ext>
             </a:extLst>
           </p:cNvPr>
@@ -11682,7 +11690,7 @@
     </p:spTree>
     <p:extLst>
       <p:ext uri="{BB962C8B-B14F-4D97-AF65-F5344CB8AC3E}">
-        <p14:creationId xmlns:p14="http://schemas.microsoft.com/office/powerpoint/2010/main" val="759873104"/>
+        <p14:creationId xmlns:p14="http://schemas.microsoft.com/office/powerpoint/2010/main" val="1643814169"/>
       </p:ext>
     </p:extLst>
   </p:cSld>
@@ -11837,7 +11845,7 @@
           <p:cNvPr id="23" name="">
             <a:extLst xmlns:a="http://schemas.openxmlformats.org/drawingml/2006/main">
               <a:ext uri="{FF2B5EF4-FFF2-40B4-BE49-F238E27FC236}">
-                <a16:creationId xmlns:a16="http://schemas.microsoft.com/office/drawing/2014/main" id="{E1E46F50-07B9-46DF-80C8-80E1CD47FE96}"/>
+                <a16:creationId xmlns:a16="http://schemas.microsoft.com/office/drawing/2014/main" id="{F3B9196A-999A-4604-9BC0-AEF38F51AC03}"/>
               </a:ext>
             </a:extLst>
           </p:cNvPr>
@@ -11869,7 +11877,7 @@
           <p:cNvPr id="2" name="">
             <a:extLst xmlns:a="http://schemas.openxmlformats.org/drawingml/2006/main">
               <a:ext uri="{FF2B5EF4-FFF2-40B4-BE49-F238E27FC236}">
-                <a16:creationId xmlns:a16="http://schemas.microsoft.com/office/drawing/2014/main" id="{60073606-19F7-4A35-BB9A-412CC8C0A227}"/>
+                <a16:creationId xmlns:a16="http://schemas.microsoft.com/office/drawing/2014/main" id="{BA14DF6E-AAF2-4209-8FB1-4C5DB73EB8DD}"/>
               </a:ext>
             </a:extLst>
           </p:cNvPr>
@@ -11926,7 +11934,7 @@
           <p:cNvPr id="3" name="">
             <a:extLst xmlns:a="http://schemas.openxmlformats.org/drawingml/2006/main">
               <a:ext uri="{FF2B5EF4-FFF2-40B4-BE49-F238E27FC236}">
-                <a16:creationId xmlns:a16="http://schemas.microsoft.com/office/drawing/2014/main" id="{DAAF24E0-DB7B-46A0-8457-478479CC59BC}"/>
+                <a16:creationId xmlns:a16="http://schemas.microsoft.com/office/drawing/2014/main" id="{4EF9E318-5628-4274-9F7D-53E418B4BE5D}"/>
               </a:ext>
             </a:extLst>
           </p:cNvPr>
@@ -11958,7 +11966,7 @@
           <p:cNvPr id="4" name="">
             <a:extLst xmlns:a="http://schemas.openxmlformats.org/drawingml/2006/main">
               <a:ext uri="{FF2B5EF4-FFF2-40B4-BE49-F238E27FC236}">
-                <a16:creationId xmlns:a16="http://schemas.microsoft.com/office/drawing/2014/main" id="{D805F5C1-EF2C-4F0E-852E-D66E5B72E6B1}"/>
+                <a16:creationId xmlns:a16="http://schemas.microsoft.com/office/drawing/2014/main" id="{B8D17D6D-8964-4F21-80D0-2E8D5520ADED}"/>
               </a:ext>
             </a:extLst>
           </p:cNvPr>
@@ -12015,7 +12023,7 @@
           <p:cNvPr id="5" name="">
             <a:extLst xmlns:a="http://schemas.openxmlformats.org/drawingml/2006/main">
               <a:ext uri="{FF2B5EF4-FFF2-40B4-BE49-F238E27FC236}">
-                <a16:creationId xmlns:a16="http://schemas.microsoft.com/office/drawing/2014/main" id="{F5713397-51FA-4F32-BBDC-BE67C2371B49}"/>
+                <a16:creationId xmlns:a16="http://schemas.microsoft.com/office/drawing/2014/main" id="{5109AEF4-13AF-43B4-AB77-C16FF68E71C7}"/>
               </a:ext>
             </a:extLst>
           </p:cNvPr>
@@ -12072,7 +12080,7 @@
           <p:cNvPr id="6" name="">
             <a:extLst xmlns:a="http://schemas.openxmlformats.org/drawingml/2006/main">
               <a:ext uri="{FF2B5EF4-FFF2-40B4-BE49-F238E27FC236}">
-                <a16:creationId xmlns:a16="http://schemas.microsoft.com/office/drawing/2014/main" id="{511B3604-0834-40D5-857E-615D782B2A76}"/>
+                <a16:creationId xmlns:a16="http://schemas.microsoft.com/office/drawing/2014/main" id="{4F5890D4-C34A-4775-BD78-3BF68FD7B7AF}"/>
               </a:ext>
             </a:extLst>
           </p:cNvPr>
@@ -12129,7 +12137,7 @@
           <p:cNvPr id="7" name="">
             <a:extLst xmlns:a="http://schemas.openxmlformats.org/drawingml/2006/main">
               <a:ext uri="{FF2B5EF4-FFF2-40B4-BE49-F238E27FC236}">
-                <a16:creationId xmlns:a16="http://schemas.microsoft.com/office/drawing/2014/main" id="{0FB47740-FFA4-4B9D-AE78-05565BB00007}"/>
+                <a16:creationId xmlns:a16="http://schemas.microsoft.com/office/drawing/2014/main" id="{715BF944-BF9B-4B6B-A79E-34C557ACFE63}"/>
               </a:ext>
             </a:extLst>
           </p:cNvPr>
@@ -12161,7 +12169,7 @@
           <p:cNvPr id="8" name="">
             <a:extLst xmlns:a="http://schemas.openxmlformats.org/drawingml/2006/main">
               <a:ext uri="{FF2B5EF4-FFF2-40B4-BE49-F238E27FC236}">
-                <a16:creationId xmlns:a16="http://schemas.microsoft.com/office/drawing/2014/main" id="{6BCD4B53-D141-4FA3-8476-5D74D792118A}"/>
+                <a16:creationId xmlns:a16="http://schemas.microsoft.com/office/drawing/2014/main" id="{FCA2CB32-960E-4BE8-80C6-DCF7DECBF782}"/>
               </a:ext>
             </a:extLst>
           </p:cNvPr>
@@ -12218,7 +12226,7 @@
           <p:cNvPr id="9" name="">
             <a:extLst xmlns:a="http://schemas.openxmlformats.org/drawingml/2006/main">
               <a:ext uri="{FF2B5EF4-FFF2-40B4-BE49-F238E27FC236}">
-                <a16:creationId xmlns:a16="http://schemas.microsoft.com/office/drawing/2014/main" id="{FD75F3EF-024D-42DE-8E1A-3530573F0686}"/>
+                <a16:creationId xmlns:a16="http://schemas.microsoft.com/office/drawing/2014/main" id="{D0ACEEAB-8FB0-430A-B671-469115FBC674}"/>
               </a:ext>
             </a:extLst>
           </p:cNvPr>
@@ -12275,7 +12283,7 @@
           <p:cNvPr id="10" name="">
             <a:extLst xmlns:a="http://schemas.openxmlformats.org/drawingml/2006/main">
               <a:ext uri="{FF2B5EF4-FFF2-40B4-BE49-F238E27FC236}">
-                <a16:creationId xmlns:a16="http://schemas.microsoft.com/office/drawing/2014/main" id="{7D6DD17B-35A6-4B3D-9EAA-A833E3973DA1}"/>
+                <a16:creationId xmlns:a16="http://schemas.microsoft.com/office/drawing/2014/main" id="{49556481-0FB6-4FAE-9867-4B4853B6D6A3}"/>
               </a:ext>
             </a:extLst>
           </p:cNvPr>
@@ -12309,7 +12317,7 @@
           <p:cNvPr id="11" name="">
             <a:extLst xmlns:a="http://schemas.openxmlformats.org/drawingml/2006/main">
               <a:ext uri="{FF2B5EF4-FFF2-40B4-BE49-F238E27FC236}">
-                <a16:creationId xmlns:a16="http://schemas.microsoft.com/office/drawing/2014/main" id="{B13F77C8-60A6-4B76-A047-409B3AC35747}"/>
+                <a16:creationId xmlns:a16="http://schemas.microsoft.com/office/drawing/2014/main" id="{A8D26198-252A-4A6D-8F38-E11FCBAE01E6}"/>
               </a:ext>
             </a:extLst>
           </p:cNvPr>
@@ -12341,7 +12349,7 @@
           <p:cNvPr id="12" name="">
             <a:extLst xmlns:a="http://schemas.openxmlformats.org/drawingml/2006/main">
               <a:ext uri="{FF2B5EF4-FFF2-40B4-BE49-F238E27FC236}">
-                <a16:creationId xmlns:a16="http://schemas.microsoft.com/office/drawing/2014/main" id="{16B0F0CA-5880-41FC-9A59-2F7DA6162E0E}"/>
+                <a16:creationId xmlns:a16="http://schemas.microsoft.com/office/drawing/2014/main" id="{36AD0F47-B70E-479F-982A-19F4F559703A}"/>
               </a:ext>
             </a:extLst>
           </p:cNvPr>
@@ -12398,7 +12406,7 @@
           <p:cNvPr id="13" name="">
             <a:extLst xmlns:a="http://schemas.openxmlformats.org/drawingml/2006/main">
               <a:ext uri="{FF2B5EF4-FFF2-40B4-BE49-F238E27FC236}">
-                <a16:creationId xmlns:a16="http://schemas.microsoft.com/office/drawing/2014/main" id="{26553247-CC34-4C43-AC58-7877EC632734}"/>
+                <a16:creationId xmlns:a16="http://schemas.microsoft.com/office/drawing/2014/main" id="{F45F11E2-3745-4BC1-A953-B1975B360893}"/>
               </a:ext>
             </a:extLst>
           </p:cNvPr>
@@ -12455,7 +12463,7 @@
           <p:cNvPr id="14" name="">
             <a:extLst xmlns:a="http://schemas.openxmlformats.org/drawingml/2006/main">
               <a:ext uri="{FF2B5EF4-FFF2-40B4-BE49-F238E27FC236}">
-                <a16:creationId xmlns:a16="http://schemas.microsoft.com/office/drawing/2014/main" id="{2F596D75-E690-4532-A6B8-F5C3A26A64A1}"/>
+                <a16:creationId xmlns:a16="http://schemas.microsoft.com/office/drawing/2014/main" id="{EBF4D347-296F-4BF0-BEDE-8FDAC57FCD53}"/>
               </a:ext>
             </a:extLst>
           </p:cNvPr>
@@ -12489,7 +12497,7 @@
           <p:cNvPr id="15" name="">
             <a:extLst xmlns:a="http://schemas.openxmlformats.org/drawingml/2006/main">
               <a:ext uri="{FF2B5EF4-FFF2-40B4-BE49-F238E27FC236}">
-                <a16:creationId xmlns:a16="http://schemas.microsoft.com/office/drawing/2014/main" id="{4B09FE59-D312-4203-BD65-526A353911FD}"/>
+                <a16:creationId xmlns:a16="http://schemas.microsoft.com/office/drawing/2014/main" id="{F9DBE445-BC82-4B0C-8532-886B0C0920AB}"/>
               </a:ext>
             </a:extLst>
           </p:cNvPr>
@@ -12521,7 +12529,7 @@
           <p:cNvPr id="16" name="">
             <a:extLst xmlns:a="http://schemas.openxmlformats.org/drawingml/2006/main">
               <a:ext uri="{FF2B5EF4-FFF2-40B4-BE49-F238E27FC236}">
-                <a16:creationId xmlns:a16="http://schemas.microsoft.com/office/drawing/2014/main" id="{64C016CA-F9D1-4861-834D-4677BD9A816E}"/>
+                <a16:creationId xmlns:a16="http://schemas.microsoft.com/office/drawing/2014/main" id="{8A56E53D-0650-4596-80DF-C90A03BCB120}"/>
               </a:ext>
             </a:extLst>
           </p:cNvPr>
@@ -12578,7 +12586,7 @@
           <p:cNvPr id="17" name="">
             <a:extLst xmlns:a="http://schemas.openxmlformats.org/drawingml/2006/main">
               <a:ext uri="{FF2B5EF4-FFF2-40B4-BE49-F238E27FC236}">
-                <a16:creationId xmlns:a16="http://schemas.microsoft.com/office/drawing/2014/main" id="{13AA1B4E-8067-43A5-9851-1B865B792DC0}"/>
+                <a16:creationId xmlns:a16="http://schemas.microsoft.com/office/drawing/2014/main" id="{A46DA068-8645-46C9-BDA7-FDB6EB1AE0A6}"/>
               </a:ext>
             </a:extLst>
           </p:cNvPr>
@@ -12635,7 +12643,7 @@
           <p:cNvPr id="18" name="">
             <a:extLst xmlns:a="http://schemas.openxmlformats.org/drawingml/2006/main">
               <a:ext uri="{FF2B5EF4-FFF2-40B4-BE49-F238E27FC236}">
-                <a16:creationId xmlns:a16="http://schemas.microsoft.com/office/drawing/2014/main" id="{0DF314A6-1888-4A37-ABF3-3DE47E53F2C8}"/>
+                <a16:creationId xmlns:a16="http://schemas.microsoft.com/office/drawing/2014/main" id="{C7A10708-9F45-4D1C-9FA8-F8A8A1C2033F}"/>
               </a:ext>
             </a:extLst>
           </p:cNvPr>
@@ -12669,7 +12677,7 @@
           <p:cNvPr id="19" name="">
             <a:extLst xmlns:a="http://schemas.openxmlformats.org/drawingml/2006/main">
               <a:ext uri="{FF2B5EF4-FFF2-40B4-BE49-F238E27FC236}">
-                <a16:creationId xmlns:a16="http://schemas.microsoft.com/office/drawing/2014/main" id="{561E21AA-D150-4D4B-8983-E9C721331080}"/>
+                <a16:creationId xmlns:a16="http://schemas.microsoft.com/office/drawing/2014/main" id="{7B86E724-A979-4126-8195-A5BF02AEFFC3}"/>
               </a:ext>
             </a:extLst>
           </p:cNvPr>
@@ -12701,7 +12709,7 @@
           <p:cNvPr id="20" name="">
             <a:extLst xmlns:a="http://schemas.openxmlformats.org/drawingml/2006/main">
               <a:ext uri="{FF2B5EF4-FFF2-40B4-BE49-F238E27FC236}">
-                <a16:creationId xmlns:a16="http://schemas.microsoft.com/office/drawing/2014/main" id="{12BAC766-35BD-4362-9E2D-E2E8B7130820}"/>
+                <a16:creationId xmlns:a16="http://schemas.microsoft.com/office/drawing/2014/main" id="{C00C4511-2A14-4A0C-84EE-5E7E9458E4BC}"/>
               </a:ext>
             </a:extLst>
           </p:cNvPr>
@@ -12758,7 +12766,7 @@
           <p:cNvPr id="21" name="">
             <a:extLst xmlns:a="http://schemas.openxmlformats.org/drawingml/2006/main">
               <a:ext uri="{FF2B5EF4-FFF2-40B4-BE49-F238E27FC236}">
-                <a16:creationId xmlns:a16="http://schemas.microsoft.com/office/drawing/2014/main" id="{FA4D3757-2DA6-4682-BBB4-1F830B7C6A63}"/>
+                <a16:creationId xmlns:a16="http://schemas.microsoft.com/office/drawing/2014/main" id="{FA1080E2-024E-42DC-ACAD-C2BAC92917FD}"/>
               </a:ext>
             </a:extLst>
           </p:cNvPr>
@@ -12815,7 +12823,7 @@
           <p:cNvPr id="22" name="">
             <a:extLst xmlns:a="http://schemas.openxmlformats.org/drawingml/2006/main">
               <a:ext uri="{FF2B5EF4-FFF2-40B4-BE49-F238E27FC236}">
-                <a16:creationId xmlns:a16="http://schemas.microsoft.com/office/drawing/2014/main" id="{34B6E827-87A7-43EF-BF58-FF2EF4397901}"/>
+                <a16:creationId xmlns:a16="http://schemas.microsoft.com/office/drawing/2014/main" id="{EE1566E5-08F3-4B78-961A-160A3A114AD2}"/>
               </a:ext>
             </a:extLst>
           </p:cNvPr>
@@ -12870,7 +12878,7 @@
     </p:spTree>
     <p:extLst>
       <p:ext uri="{BB962C8B-B14F-4D97-AF65-F5344CB8AC3E}">
-        <p14:creationId xmlns:p14="http://schemas.microsoft.com/office/powerpoint/2010/main" val="2065185711"/>
+        <p14:creationId xmlns:p14="http://schemas.microsoft.com/office/powerpoint/2010/main" val="1149614383"/>
       </p:ext>
     </p:extLst>
   </p:cSld>
@@ -13071,7 +13079,7 @@
           <p:cNvPr id="22" name="">
             <a:extLst xmlns:a="http://schemas.openxmlformats.org/drawingml/2006/main">
               <a:ext uri="{FF2B5EF4-FFF2-40B4-BE49-F238E27FC236}">
-                <a16:creationId xmlns:a16="http://schemas.microsoft.com/office/drawing/2014/main" id="{97D7DB47-1AD4-4FCF-A4D8-3926D69E12F1}"/>
+                <a16:creationId xmlns:a16="http://schemas.microsoft.com/office/drawing/2014/main" id="{4A5683F3-D6A5-481D-89BF-2DB2B63FD48B}"/>
               </a:ext>
             </a:extLst>
           </p:cNvPr>
@@ -13103,7 +13111,7 @@
           <p:cNvPr id="2" name="">
             <a:extLst xmlns:a="http://schemas.openxmlformats.org/drawingml/2006/main">
               <a:ext uri="{FF2B5EF4-FFF2-40B4-BE49-F238E27FC236}">
-                <a16:creationId xmlns:a16="http://schemas.microsoft.com/office/drawing/2014/main" id="{584BF749-AAD9-4DFF-89C5-E97F532470F1}"/>
+                <a16:creationId xmlns:a16="http://schemas.microsoft.com/office/drawing/2014/main" id="{02B51ABB-B95C-4739-8CBA-C8707A3A43D0}"/>
               </a:ext>
             </a:extLst>
           </p:cNvPr>
@@ -13160,7 +13168,7 @@
           <p:cNvPr id="3" name="">
             <a:extLst xmlns:a="http://schemas.openxmlformats.org/drawingml/2006/main">
               <a:ext uri="{FF2B5EF4-FFF2-40B4-BE49-F238E27FC236}">
-                <a16:creationId xmlns:a16="http://schemas.microsoft.com/office/drawing/2014/main" id="{043C99A0-F339-4DB6-B135-C80202378ED4}"/>
+                <a16:creationId xmlns:a16="http://schemas.microsoft.com/office/drawing/2014/main" id="{8F078C93-72FB-4413-8662-929F3ABA8E58}"/>
               </a:ext>
             </a:extLst>
           </p:cNvPr>
@@ -13192,7 +13200,7 @@
           <p:cNvPr id="4" name="">
             <a:extLst xmlns:a="http://schemas.openxmlformats.org/drawingml/2006/main">
               <a:ext uri="{FF2B5EF4-FFF2-40B4-BE49-F238E27FC236}">
-                <a16:creationId xmlns:a16="http://schemas.microsoft.com/office/drawing/2014/main" id="{2CF4E35C-0C50-4D32-ABFD-A5DBF61C6656}"/>
+                <a16:creationId xmlns:a16="http://schemas.microsoft.com/office/drawing/2014/main" id="{26BD32D2-5566-4B6A-93F0-D0F03F713E27}"/>
               </a:ext>
             </a:extLst>
           </p:cNvPr>
@@ -13249,7 +13257,7 @@
           <p:cNvPr id="5" name="">
             <a:extLst xmlns:a="http://schemas.openxmlformats.org/drawingml/2006/main">
               <a:ext uri="{FF2B5EF4-FFF2-40B4-BE49-F238E27FC236}">
-                <a16:creationId xmlns:a16="http://schemas.microsoft.com/office/drawing/2014/main" id="{01A83E7F-DC06-43B1-9C27-2A8E35980537}"/>
+                <a16:creationId xmlns:a16="http://schemas.microsoft.com/office/drawing/2014/main" id="{A70BEE8F-9D67-49AA-87E5-49AA6D938DE2}"/>
               </a:ext>
             </a:extLst>
           </p:cNvPr>
@@ -13306,7 +13314,7 @@
           <p:cNvPr id="6" name="">
             <a:extLst xmlns:a="http://schemas.openxmlformats.org/drawingml/2006/main">
               <a:ext uri="{FF2B5EF4-FFF2-40B4-BE49-F238E27FC236}">
-                <a16:creationId xmlns:a16="http://schemas.microsoft.com/office/drawing/2014/main" id="{1965F9EB-5AFB-428E-B02F-A6B90E06B841}"/>
+                <a16:creationId xmlns:a16="http://schemas.microsoft.com/office/drawing/2014/main" id="{CBF1C7D9-E5F2-4CD6-B1A4-CF9C2D6A2073}"/>
               </a:ext>
             </a:extLst>
           </p:cNvPr>
@@ -13363,7 +13371,7 @@
           <p:cNvPr id="7" name="">
             <a:extLst xmlns:a="http://schemas.openxmlformats.org/drawingml/2006/main">
               <a:ext uri="{FF2B5EF4-FFF2-40B4-BE49-F238E27FC236}">
-                <a16:creationId xmlns:a16="http://schemas.microsoft.com/office/drawing/2014/main" id="{33C170B4-3960-494D-96CD-32EF12CB3009}"/>
+                <a16:creationId xmlns:a16="http://schemas.microsoft.com/office/drawing/2014/main" id="{0B2EE4F5-E33F-45A4-A449-63CB1661BDAE}"/>
               </a:ext>
             </a:extLst>
           </p:cNvPr>
@@ -13395,7 +13403,7 @@
           <p:cNvPr id="8" name="">
             <a:extLst xmlns:a="http://schemas.openxmlformats.org/drawingml/2006/main">
               <a:ext uri="{FF2B5EF4-FFF2-40B4-BE49-F238E27FC236}">
-                <a16:creationId xmlns:a16="http://schemas.microsoft.com/office/drawing/2014/main" id="{D1BF136A-4A59-4DA0-AE9D-AC0819EBF46C}"/>
+                <a16:creationId xmlns:a16="http://schemas.microsoft.com/office/drawing/2014/main" id="{549514E4-0706-4B07-A214-504A11AC8F88}"/>
               </a:ext>
             </a:extLst>
           </p:cNvPr>
@@ -13452,7 +13460,7 @@
           <p:cNvPr id="9" name="">
             <a:extLst xmlns:a="http://schemas.openxmlformats.org/drawingml/2006/main">
               <a:ext uri="{FF2B5EF4-FFF2-40B4-BE49-F238E27FC236}">
-                <a16:creationId xmlns:a16="http://schemas.microsoft.com/office/drawing/2014/main" id="{74098D52-948C-4F6D-90F9-EEC0EEF9558E}"/>
+                <a16:creationId xmlns:a16="http://schemas.microsoft.com/office/drawing/2014/main" id="{CEF0CE18-A531-4043-A28D-E785F9B172F0}"/>
               </a:ext>
             </a:extLst>
           </p:cNvPr>
@@ -13509,7 +13517,7 @@
           <p:cNvPr id="10" name="">
             <a:extLst xmlns:a="http://schemas.openxmlformats.org/drawingml/2006/main">
               <a:ext uri="{FF2B5EF4-FFF2-40B4-BE49-F238E27FC236}">
-                <a16:creationId xmlns:a16="http://schemas.microsoft.com/office/drawing/2014/main" id="{B17F1622-56FD-4360-A500-53F1E6B146E1}"/>
+                <a16:creationId xmlns:a16="http://schemas.microsoft.com/office/drawing/2014/main" id="{EE2DCFE3-D65D-4AB2-8C07-75E003EDF099}"/>
               </a:ext>
             </a:extLst>
           </p:cNvPr>
@@ -13543,7 +13551,7 @@
           <p:cNvPr id="11" name="">
             <a:extLst xmlns:a="http://schemas.openxmlformats.org/drawingml/2006/main">
               <a:ext uri="{FF2B5EF4-FFF2-40B4-BE49-F238E27FC236}">
-                <a16:creationId xmlns:a16="http://schemas.microsoft.com/office/drawing/2014/main" id="{47252F6C-AA4C-4F1A-9CB0-75058F5287D6}"/>
+                <a16:creationId xmlns:a16="http://schemas.microsoft.com/office/drawing/2014/main" id="{A7F35C71-42F2-4FEF-8C79-6124B09B8ACB}"/>
               </a:ext>
             </a:extLst>
           </p:cNvPr>
@@ -13575,7 +13583,7 @@
           <p:cNvPr id="12" name="">
             <a:extLst xmlns:a="http://schemas.openxmlformats.org/drawingml/2006/main">
               <a:ext uri="{FF2B5EF4-FFF2-40B4-BE49-F238E27FC236}">
-                <a16:creationId xmlns:a16="http://schemas.microsoft.com/office/drawing/2014/main" id="{99D50C55-2AD4-4953-A7F5-0257311F1948}"/>
+                <a16:creationId xmlns:a16="http://schemas.microsoft.com/office/drawing/2014/main" id="{35C3533E-0A3D-489E-8FCD-BE98C47A1333}"/>
               </a:ext>
             </a:extLst>
           </p:cNvPr>
@@ -13632,7 +13640,7 @@
           <p:cNvPr id="13" name="">
             <a:extLst xmlns:a="http://schemas.openxmlformats.org/drawingml/2006/main">
               <a:ext uri="{FF2B5EF4-FFF2-40B4-BE49-F238E27FC236}">
-                <a16:creationId xmlns:a16="http://schemas.microsoft.com/office/drawing/2014/main" id="{C33AA5D0-2C4B-482A-89ED-472E843175D4}"/>
+                <a16:creationId xmlns:a16="http://schemas.microsoft.com/office/drawing/2014/main" id="{90ADDE14-6DCF-4EAD-B59D-5F56597F9999}"/>
               </a:ext>
             </a:extLst>
           </p:cNvPr>
@@ -13689,7 +13697,7 @@
           <p:cNvPr id="14" name="">
             <a:extLst xmlns:a="http://schemas.openxmlformats.org/drawingml/2006/main">
               <a:ext uri="{FF2B5EF4-FFF2-40B4-BE49-F238E27FC236}">
-                <a16:creationId xmlns:a16="http://schemas.microsoft.com/office/drawing/2014/main" id="{4BB9D7E5-A41C-46D3-9202-0438E290FCDA}"/>
+                <a16:creationId xmlns:a16="http://schemas.microsoft.com/office/drawing/2014/main" id="{6F65D912-6D10-4D58-B487-F13BCC778F4C}"/>
               </a:ext>
             </a:extLst>
           </p:cNvPr>
@@ -13723,7 +13731,7 @@
           <p:cNvPr id="15" name="">
             <a:extLst xmlns:a="http://schemas.openxmlformats.org/drawingml/2006/main">
               <a:ext uri="{FF2B5EF4-FFF2-40B4-BE49-F238E27FC236}">
-                <a16:creationId xmlns:a16="http://schemas.microsoft.com/office/drawing/2014/main" id="{1077FBAE-DC44-4627-85D8-FA71AAB7C501}"/>
+                <a16:creationId xmlns:a16="http://schemas.microsoft.com/office/drawing/2014/main" id="{0F326FAE-2E98-4595-B444-981F2CDD0B14}"/>
               </a:ext>
             </a:extLst>
           </p:cNvPr>
@@ -13755,7 +13763,7 @@
           <p:cNvPr id="16" name="">
             <a:extLst xmlns:a="http://schemas.openxmlformats.org/drawingml/2006/main">
               <a:ext uri="{FF2B5EF4-FFF2-40B4-BE49-F238E27FC236}">
-                <a16:creationId xmlns:a16="http://schemas.microsoft.com/office/drawing/2014/main" id="{B922A3F4-74DA-4DA7-ADEF-C8C2E505066E}"/>
+                <a16:creationId xmlns:a16="http://schemas.microsoft.com/office/drawing/2014/main" id="{0E8FC4AF-4DA8-4481-8B01-CD3DD8F11526}"/>
               </a:ext>
             </a:extLst>
           </p:cNvPr>
@@ -13812,7 +13820,7 @@
           <p:cNvPr id="17" name="">
             <a:extLst xmlns:a="http://schemas.openxmlformats.org/drawingml/2006/main">
               <a:ext uri="{FF2B5EF4-FFF2-40B4-BE49-F238E27FC236}">
-                <a16:creationId xmlns:a16="http://schemas.microsoft.com/office/drawing/2014/main" id="{FC71D7FD-818B-43BC-AAD8-3BC7BBDB3B46}"/>
+                <a16:creationId xmlns:a16="http://schemas.microsoft.com/office/drawing/2014/main" id="{B9DE4195-2A9C-4539-8690-BAEAE191C341}"/>
               </a:ext>
             </a:extLst>
           </p:cNvPr>
@@ -13869,7 +13877,7 @@
           <p:cNvPr id="18" name="">
             <a:extLst xmlns:a="http://schemas.openxmlformats.org/drawingml/2006/main">
               <a:ext uri="{FF2B5EF4-FFF2-40B4-BE49-F238E27FC236}">
-                <a16:creationId xmlns:a16="http://schemas.microsoft.com/office/drawing/2014/main" id="{FAD9DB38-B6F6-40A3-BDD1-7BE0A6A349A2}"/>
+                <a16:creationId xmlns:a16="http://schemas.microsoft.com/office/drawing/2014/main" id="{0ADC6F3A-1E37-40F0-977E-A8A878D0D918}"/>
               </a:ext>
             </a:extLst>
           </p:cNvPr>
@@ -13903,7 +13911,7 @@
           <p:cNvPr id="19" name="">
             <a:extLst xmlns:a="http://schemas.openxmlformats.org/drawingml/2006/main">
               <a:ext uri="{FF2B5EF4-FFF2-40B4-BE49-F238E27FC236}">
-                <a16:creationId xmlns:a16="http://schemas.microsoft.com/office/drawing/2014/main" id="{8269A8E3-1F8E-4644-BB16-633C2948DF26}"/>
+                <a16:creationId xmlns:a16="http://schemas.microsoft.com/office/drawing/2014/main" id="{64DB59F1-2D9A-4440-924C-75F96EB309B4}"/>
               </a:ext>
             </a:extLst>
           </p:cNvPr>
@@ -13935,7 +13943,7 @@
           <p:cNvPr id="20" name="">
             <a:extLst xmlns:a="http://schemas.openxmlformats.org/drawingml/2006/main">
               <a:ext uri="{FF2B5EF4-FFF2-40B4-BE49-F238E27FC236}">
-                <a16:creationId xmlns:a16="http://schemas.microsoft.com/office/drawing/2014/main" id="{6929721F-CEA1-4A56-9740-2094940D8CC6}"/>
+                <a16:creationId xmlns:a16="http://schemas.microsoft.com/office/drawing/2014/main" id="{1AB1BB38-6B71-4FDD-B3CD-EEF740001561}"/>
               </a:ext>
             </a:extLst>
           </p:cNvPr>
@@ -13992,7 +14000,7 @@
           <p:cNvPr id="21" name="">
             <a:extLst xmlns:a="http://schemas.openxmlformats.org/drawingml/2006/main">
               <a:ext uri="{FF2B5EF4-FFF2-40B4-BE49-F238E27FC236}">
-                <a16:creationId xmlns:a16="http://schemas.microsoft.com/office/drawing/2014/main" id="{55D32083-B09A-4074-8074-5147586DAE12}"/>
+                <a16:creationId xmlns:a16="http://schemas.microsoft.com/office/drawing/2014/main" id="{81EE20CA-5679-44CD-972C-770A10F0DAE2}"/>
               </a:ext>
             </a:extLst>
           </p:cNvPr>
@@ -14047,7 +14055,7 @@
     </p:spTree>
     <p:extLst>
       <p:ext uri="{BB962C8B-B14F-4D97-AF65-F5344CB8AC3E}">
-        <p14:creationId xmlns:p14="http://schemas.microsoft.com/office/powerpoint/2010/main" val="346383237"/>
+        <p14:creationId xmlns:p14="http://schemas.microsoft.com/office/powerpoint/2010/main" val="250047319"/>
       </p:ext>
     </p:extLst>
   </p:cSld>
